--- a/Docs/Slides/S2520110_仁木祥真_20261028.pptx
+++ b/Docs/Slides/S2520110_仁木祥真_20261028.pptx
@@ -1,14 +1,11 @@
 
 <file path=ppt/presentation.xml><?xml version="1.0" encoding="utf-8"?>
-<p:presentation xmlns:a="http://schemas.openxmlformats.org/drawingml/2006/main" xmlns:r="http://schemas.openxmlformats.org/officeDocument/2006/relationships" xmlns:p="http://schemas.openxmlformats.org/presentationml/2006/main" saveSubsetFonts="1">
+<p:presentation xmlns:a="http://schemas.openxmlformats.org/drawingml/2006/main" xmlns:r="http://schemas.openxmlformats.org/officeDocument/2006/relationships" xmlns:p="http://schemas.openxmlformats.org/presentationml/2006/main" saveSubsetFonts="1" autoCompressPictures="0">
   <p:sldMasterIdLst>
-    <p:sldMasterId id="2147483660" r:id="rId4"/>
+    <p:sldMasterId id="2147483648" r:id="rId1"/>
   </p:sldMasterIdLst>
-  <p:notesMasterIdLst>
-    <p:notesMasterId r:id="rId68"/>
-  </p:notesMasterIdLst>
   <p:sldIdLst>
-    <p:sldId id="256" r:id="rId7"/>
+    <p:sldId id="256" r:id="rId2"/>
     <p:sldId id="257" r:id="rId8"/>
     <p:sldId id="258" r:id="rId9"/>
     <p:sldId id="259" r:id="rId10"/>
@@ -35,7 +32,7 @@
     <p:sldId id="280" r:id="rId31"/>
     <p:sldId id="281" r:id="rId32"/>
   </p:sldIdLst>
-  <p:sldSz cx="12192000" cy="6858000"/>
+  <p:sldSz cx="12192000" cy="6858000" type="screen4x3"/>
   <p:notesSz cx="6858000" cy="9144000"/>
   <p:defaultTextStyle>
     <a:defPPr>
@@ -136,7 +133,7 @@
 </file>
 
 <file path=ppt/notesMasters/notesMaster1.xml><?xml version="1.0" encoding="utf-8"?>
-<p:notesMaster xmlns:a="http://schemas.openxmlformats.org/drawingml/2006/main" xmlns:r="http://schemas.openxmlformats.org/officeDocument/2006/relationships" xmlns:p="http://schemas.openxmlformats.org/presentationml/2006/main">
+<p:notesMaster xmlns:a="http://schemas.openxmlformats.org/drawingml/2006/main" xmlns:p="http://schemas.openxmlformats.org/presentationml/2006/main" xmlns:r="http://schemas.openxmlformats.org/officeDocument/2006/relationships">
   <p:cSld>
     <p:bg>
       <p:bgRef idx="1001">
@@ -159,7 +156,7 @@
       </p:grpSpPr>
       <p:sp>
         <p:nvSpPr>
-          <p:cNvPr id="2" name="ヘッダー プレースホルダー 1"/>
+          <p:cNvPr id="2" name="Header Placeholder 1"/>
           <p:cNvSpPr>
             <a:spLocks noGrp="1"/>
           </p:cNvSpPr>
@@ -170,7 +167,7 @@
         <p:spPr>
           <a:xfrm>
             <a:off x="0" y="0"/>
-            <a:ext cx="2971800" cy="458788"/>
+            <a:ext cx="2971800" cy="457200"/>
           </a:xfrm>
           <a:prstGeom prst="rect">
             <a:avLst/>
@@ -184,13 +181,13 @@
             </a:lvl1pPr>
           </a:lstStyle>
           <a:p>
-            <a:endParaRPr kumimoji="1" lang="ja-JP" altLang="en-US"/>
-          </a:p>
-        </p:txBody>
-      </p:sp>
-      <p:sp>
-        <p:nvSpPr>
-          <p:cNvPr id="3" name="日付プレースホルダー 2"/>
+            <a:endParaRPr lang="en-US"/>
+          </a:p>
+        </p:txBody>
+      </p:sp>
+      <p:sp>
+        <p:nvSpPr>
+          <p:cNvPr id="3" name="Date Placeholder 2"/>
           <p:cNvSpPr>
             <a:spLocks noGrp="1"/>
           </p:cNvSpPr>
@@ -201,7 +198,7 @@
         <p:spPr>
           <a:xfrm>
             <a:off x="3884613" y="0"/>
-            <a:ext cx="2971800" cy="458788"/>
+            <a:ext cx="2971800" cy="457200"/>
           </a:xfrm>
           <a:prstGeom prst="rect">
             <a:avLst/>
@@ -215,17 +212,17 @@
             </a:lvl1pPr>
           </a:lstStyle>
           <a:p>
-            <a:fld id="{6F99DED1-B318-4257-9D16-B78C461D723E}" type="datetimeFigureOut">
-              <a:rPr kumimoji="1" lang="ja-JP" altLang="en-US" smtClean="0"/>
-              <a:t>2026/10/6</a:t>
+            <a:fld id="{0F89C1C7-3DCD-1040-A9CF-14679D8B5DDD}" type="datetimeFigureOut">
+              <a:rPr lang="en-US" smtClean="0"/>
+              <a:t>10/17/16</a:t>
             </a:fld>
-            <a:endParaRPr kumimoji="1" lang="ja-JP" altLang="en-US"/>
-          </a:p>
-        </p:txBody>
-      </p:sp>
-      <p:sp>
-        <p:nvSpPr>
-          <p:cNvPr id="4" name="スライド イメージ プレースホルダー 3"/>
+            <a:endParaRPr lang="en-US"/>
+          </a:p>
+        </p:txBody>
+      </p:sp>
+      <p:sp>
+        <p:nvSpPr>
+          <p:cNvPr id="4" name="Slide Image Placeholder 3"/>
           <p:cNvSpPr>
             <a:spLocks noGrp="1" noRot="1" noChangeAspect="1"/>
           </p:cNvSpPr>
@@ -235,8 +232,8 @@
         </p:nvSpPr>
         <p:spPr>
           <a:xfrm>
-            <a:off x="685800" y="1143000"/>
-            <a:ext cx="5486400" cy="3086100"/>
+            <a:off x="1143000" y="685800"/>
+            <a:ext cx="4572000" cy="3429000"/>
           </a:xfrm>
           <a:prstGeom prst="rect">
             <a:avLst/>
@@ -252,13 +249,13 @@
           <a:bodyPr vert="horz" lIns="91440" tIns="45720" rIns="91440" bIns="45720" rtlCol="0" anchor="ctr"/>
           <a:lstStyle/>
           <a:p>
-            <a:endParaRPr lang="ja-JP" altLang="en-US"/>
-          </a:p>
-        </p:txBody>
-      </p:sp>
-      <p:sp>
-        <p:nvSpPr>
-          <p:cNvPr id="5" name="ノート プレースホルダー 4"/>
+            <a:endParaRPr lang="en-US"/>
+          </a:p>
+        </p:txBody>
+      </p:sp>
+      <p:sp>
+        <p:nvSpPr>
+          <p:cNvPr id="5" name="Notes Placeholder 4"/>
           <p:cNvSpPr>
             <a:spLocks noGrp="1"/>
           </p:cNvSpPr>
@@ -268,8 +265,8 @@
         </p:nvSpPr>
         <p:spPr>
           <a:xfrm>
-            <a:off x="685800" y="4400550"/>
-            <a:ext cx="5486400" cy="3600450"/>
+            <a:off x="685800" y="4343400"/>
+            <a:ext cx="5486400" cy="4114800"/>
           </a:xfrm>
           <a:prstGeom prst="rect">
             <a:avLst/>
@@ -281,75 +278,44 @@
           <a:p>
             <a:pPr lvl="0"/>
             <a:r>
-              <a:rPr kumimoji="1" lang="ja-JP" altLang="en-US"/>
-              <a:t>マスター テキストの書式設定</a:t>
+              <a:rPr lang="en-US" smtClean="0"/>
+              <a:t>Click to edit Master text styles</a:t>
             </a:r>
           </a:p>
           <a:p>
             <a:pPr lvl="1"/>
             <a:r>
-              <a:rPr kumimoji="1" lang="ja-JP" altLang="en-US"/>
-              <a:t>第 </a:t>
-            </a:r>
-            <a:r>
-              <a:rPr kumimoji="1" lang="en-US" altLang="ja-JP"/>
-              <a:t>2 </a:t>
-            </a:r>
-            <a:r>
-              <a:rPr kumimoji="1" lang="ja-JP" altLang="en-US"/>
-              <a:t>レベル</a:t>
+              <a:rPr lang="en-US" smtClean="0"/>
+              <a:t>Second level</a:t>
             </a:r>
           </a:p>
           <a:p>
             <a:pPr lvl="2"/>
             <a:r>
-              <a:rPr kumimoji="1" lang="ja-JP" altLang="en-US"/>
-              <a:t>第 </a:t>
-            </a:r>
-            <a:r>
-              <a:rPr kumimoji="1" lang="en-US" altLang="ja-JP"/>
-              <a:t>3 </a:t>
-            </a:r>
-            <a:r>
-              <a:rPr kumimoji="1" lang="ja-JP" altLang="en-US"/>
-              <a:t>レベル</a:t>
+              <a:rPr lang="en-US" smtClean="0"/>
+              <a:t>Third level</a:t>
             </a:r>
           </a:p>
           <a:p>
             <a:pPr lvl="3"/>
             <a:r>
-              <a:rPr kumimoji="1" lang="ja-JP" altLang="en-US"/>
-              <a:t>第 </a:t>
-            </a:r>
-            <a:r>
-              <a:rPr kumimoji="1" lang="en-US" altLang="ja-JP"/>
-              <a:t>4 </a:t>
-            </a:r>
-            <a:r>
-              <a:rPr kumimoji="1" lang="ja-JP" altLang="en-US"/>
-              <a:t>レベル</a:t>
+              <a:rPr lang="en-US" smtClean="0"/>
+              <a:t>Fourth level</a:t>
             </a:r>
           </a:p>
           <a:p>
             <a:pPr lvl="4"/>
             <a:r>
-              <a:rPr kumimoji="1" lang="ja-JP" altLang="en-US"/>
-              <a:t>第 </a:t>
-            </a:r>
-            <a:r>
-              <a:rPr kumimoji="1" lang="en-US" altLang="ja-JP"/>
-              <a:t>5 </a:t>
-            </a:r>
-            <a:r>
-              <a:rPr kumimoji="1" lang="ja-JP" altLang="en-US"/>
-              <a:t>レベル</a:t>
-            </a:r>
-          </a:p>
-        </p:txBody>
-      </p:sp>
-      <p:sp>
-        <p:nvSpPr>
-          <p:cNvPr id="6" name="フッター プレースホルダー 5"/>
+              <a:rPr lang="en-US" smtClean="0"/>
+              <a:t>Fifth level</a:t>
+            </a:r>
+            <a:endParaRPr lang="en-US"/>
+          </a:p>
+        </p:txBody>
+      </p:sp>
+      <p:sp>
+        <p:nvSpPr>
+          <p:cNvPr id="6" name="Footer Placeholder 5"/>
           <p:cNvSpPr>
             <a:spLocks noGrp="1"/>
           </p:cNvSpPr>
@@ -360,7 +326,7 @@
         <p:spPr>
           <a:xfrm>
             <a:off x="0" y="8685213"/>
-            <a:ext cx="2971800" cy="458787"/>
+            <a:ext cx="2971800" cy="457200"/>
           </a:xfrm>
           <a:prstGeom prst="rect">
             <a:avLst/>
@@ -374,13 +340,13 @@
             </a:lvl1pPr>
           </a:lstStyle>
           <a:p>
-            <a:endParaRPr kumimoji="1" lang="ja-JP" altLang="en-US"/>
-          </a:p>
-        </p:txBody>
-      </p:sp>
-      <p:sp>
-        <p:nvSpPr>
-          <p:cNvPr id="7" name="スライド番号プレースホルダー 6"/>
+            <a:endParaRPr lang="en-US"/>
+          </a:p>
+        </p:txBody>
+      </p:sp>
+      <p:sp>
+        <p:nvSpPr>
+          <p:cNvPr id="7" name="Slide Number Placeholder 6"/>
           <p:cNvSpPr>
             <a:spLocks noGrp="1"/>
           </p:cNvSpPr>
@@ -391,7 +357,7 @@
         <p:spPr>
           <a:xfrm>
             <a:off x="3884613" y="8685213"/>
-            <a:ext cx="2971800" cy="458787"/>
+            <a:ext cx="2971800" cy="457200"/>
           </a:xfrm>
           <a:prstGeom prst="rect">
             <a:avLst/>
@@ -405,25 +371,25 @@
             </a:lvl1pPr>
           </a:lstStyle>
           <a:p>
-            <a:fld id="{F631AEA4-00AA-43CA-BAF6-D9193AF03ADC}" type="slidenum">
-              <a:rPr kumimoji="1" lang="ja-JP" altLang="en-US" smtClean="0"/>
+            <a:fld id="{BB5E49A5-4136-284D-997B-48E1D791AD67}" type="slidenum">
+              <a:rPr lang="en-US" smtClean="0"/>
               <a:t>‹#›</a:t>
             </a:fld>
-            <a:endParaRPr kumimoji="1" lang="ja-JP" altLang="en-US"/>
+            <a:endParaRPr lang="en-US"/>
           </a:p>
         </p:txBody>
       </p:sp>
     </p:spTree>
     <p:extLst>
       <p:ext uri="{BB962C8B-B14F-4D97-AF65-F5344CB8AC3E}">
-        <p14:creationId xmlns:p14="http://schemas.microsoft.com/office/powerpoint/2010/main" val="1473803147"/>
+        <p14:creationId xmlns:p14="http://schemas.microsoft.com/office/powerpoint/2010/main" val="2623252185"/>
       </p:ext>
     </p:extLst>
   </p:cSld>
   <p:clrMap bg1="lt1" tx1="dk1" bg2="lt2" tx2="dk2" accent1="accent1" accent2="accent2" accent3="accent3" accent4="accent4" accent5="accent5" accent6="accent6" hlink="hlink" folHlink="folHlink"/>
   <p:notesStyle>
-    <a:lvl1pPr marL="0" algn="l" defTabSz="1097280" rtl="0" eaLnBrk="1" latinLnBrk="0" hangingPunct="1">
-      <a:defRPr kumimoji="1" sz="1440" kern="1200">
+    <a:lvl1pPr marL="0" algn="l" defTabSz="457200" rtl="0" eaLnBrk="1" latinLnBrk="0" hangingPunct="1">
+      <a:defRPr sz="1200" kern="1200">
         <a:solidFill>
           <a:schemeClr val="tx1"/>
         </a:solidFill>
@@ -432,8 +398,8 @@
         <a:cs typeface="+mn-cs"/>
       </a:defRPr>
     </a:lvl1pPr>
-    <a:lvl2pPr marL="548640" algn="l" defTabSz="1097280" rtl="0" eaLnBrk="1" latinLnBrk="0" hangingPunct="1">
-      <a:defRPr kumimoji="1" sz="1440" kern="1200">
+    <a:lvl2pPr marL="457200" algn="l" defTabSz="457200" rtl="0" eaLnBrk="1" latinLnBrk="0" hangingPunct="1">
+      <a:defRPr sz="1200" kern="1200">
         <a:solidFill>
           <a:schemeClr val="tx1"/>
         </a:solidFill>
@@ -442,8 +408,8 @@
         <a:cs typeface="+mn-cs"/>
       </a:defRPr>
     </a:lvl2pPr>
-    <a:lvl3pPr marL="1097280" algn="l" defTabSz="1097280" rtl="0" eaLnBrk="1" latinLnBrk="0" hangingPunct="1">
-      <a:defRPr kumimoji="1" sz="1440" kern="1200">
+    <a:lvl3pPr marL="914400" algn="l" defTabSz="457200" rtl="0" eaLnBrk="1" latinLnBrk="0" hangingPunct="1">
+      <a:defRPr sz="1200" kern="1200">
         <a:solidFill>
           <a:schemeClr val="tx1"/>
         </a:solidFill>
@@ -452,8 +418,8 @@
         <a:cs typeface="+mn-cs"/>
       </a:defRPr>
     </a:lvl3pPr>
-    <a:lvl4pPr marL="1645920" algn="l" defTabSz="1097280" rtl="0" eaLnBrk="1" latinLnBrk="0" hangingPunct="1">
-      <a:defRPr kumimoji="1" sz="1440" kern="1200">
+    <a:lvl4pPr marL="1371600" algn="l" defTabSz="457200" rtl="0" eaLnBrk="1" latinLnBrk="0" hangingPunct="1">
+      <a:defRPr sz="1200" kern="1200">
         <a:solidFill>
           <a:schemeClr val="tx1"/>
         </a:solidFill>
@@ -462,8 +428,8 @@
         <a:cs typeface="+mn-cs"/>
       </a:defRPr>
     </a:lvl4pPr>
-    <a:lvl5pPr marL="2194560" algn="l" defTabSz="1097280" rtl="0" eaLnBrk="1" latinLnBrk="0" hangingPunct="1">
-      <a:defRPr kumimoji="1" sz="1440" kern="1200">
+    <a:lvl5pPr marL="1828800" algn="l" defTabSz="457200" rtl="0" eaLnBrk="1" latinLnBrk="0" hangingPunct="1">
+      <a:defRPr sz="1200" kern="1200">
         <a:solidFill>
           <a:schemeClr val="tx1"/>
         </a:solidFill>
@@ -472,8 +438,8 @@
         <a:cs typeface="+mn-cs"/>
       </a:defRPr>
     </a:lvl5pPr>
-    <a:lvl6pPr marL="2743200" algn="l" defTabSz="1097280" rtl="0" eaLnBrk="1" latinLnBrk="0" hangingPunct="1">
-      <a:defRPr kumimoji="1" sz="1440" kern="1200">
+    <a:lvl6pPr marL="2286000" algn="l" defTabSz="457200" rtl="0" eaLnBrk="1" latinLnBrk="0" hangingPunct="1">
+      <a:defRPr sz="1200" kern="1200">
         <a:solidFill>
           <a:schemeClr val="tx1"/>
         </a:solidFill>
@@ -482,8 +448,8 @@
         <a:cs typeface="+mn-cs"/>
       </a:defRPr>
     </a:lvl6pPr>
-    <a:lvl7pPr marL="3291840" algn="l" defTabSz="1097280" rtl="0" eaLnBrk="1" latinLnBrk="0" hangingPunct="1">
-      <a:defRPr kumimoji="1" sz="1440" kern="1200">
+    <a:lvl7pPr marL="2743200" algn="l" defTabSz="457200" rtl="0" eaLnBrk="1" latinLnBrk="0" hangingPunct="1">
+      <a:defRPr sz="1200" kern="1200">
         <a:solidFill>
           <a:schemeClr val="tx1"/>
         </a:solidFill>
@@ -492,8 +458,8 @@
         <a:cs typeface="+mn-cs"/>
       </a:defRPr>
     </a:lvl7pPr>
-    <a:lvl8pPr marL="3840480" algn="l" defTabSz="1097280" rtl="0" eaLnBrk="1" latinLnBrk="0" hangingPunct="1">
-      <a:defRPr kumimoji="1" sz="1440" kern="1200">
+    <a:lvl8pPr marL="3200400" algn="l" defTabSz="457200" rtl="0" eaLnBrk="1" latinLnBrk="0" hangingPunct="1">
+      <a:defRPr sz="1200" kern="1200">
         <a:solidFill>
           <a:schemeClr val="tx1"/>
         </a:solidFill>
@@ -502,8 +468,8 @@
         <a:cs typeface="+mn-cs"/>
       </a:defRPr>
     </a:lvl8pPr>
-    <a:lvl9pPr marL="4389120" algn="l" defTabSz="1097280" rtl="0" eaLnBrk="1" latinLnBrk="0" hangingPunct="1">
-      <a:defRPr kumimoji="1" sz="1440" kern="1200">
+    <a:lvl9pPr marL="3657600" algn="l" defTabSz="457200" rtl="0" eaLnBrk="1" latinLnBrk="0" hangingPunct="1">
+      <a:defRPr sz="1200" kern="1200">
         <a:solidFill>
           <a:schemeClr val="tx1"/>
         </a:solidFill>
@@ -2338,7 +2304,7 @@
 
 <file path=ppt/slideLayouts/slideLayout1.xml><?xml version="1.0" encoding="utf-8"?>
 <p:sldLayout xmlns:a="http://schemas.openxmlformats.org/drawingml/2006/main" xmlns:r="http://schemas.openxmlformats.org/officeDocument/2006/relationships" xmlns:p="http://schemas.openxmlformats.org/presentationml/2006/main" type="title" preserve="1">
-  <p:cSld name="タイトル スライド">
+  <p:cSld name="Title Slide">
     <p:spTree>
       <p:nvGrpSpPr>
         <p:cNvPr id="1" name=""/>
@@ -2365,21 +2331,17 @@
         </p:nvSpPr>
         <p:spPr>
           <a:xfrm>
-            <a:off x="1828800" y="1346836"/>
-            <a:ext cx="10972800" cy="2865120"/>
-          </a:xfrm>
-        </p:spPr>
-        <p:txBody>
-          <a:bodyPr anchor="b"/>
-          <a:lstStyle>
-            <a:lvl1pPr algn="ctr">
-              <a:defRPr sz="7200"/>
-            </a:lvl1pPr>
-          </a:lstStyle>
-          <a:p>
-            <a:r>
-              <a:rPr lang="ja-JP" altLang="en-US"/>
-              <a:t>マスター タイトルの書式設定</a:t>
+            <a:off x="685800" y="2130425"/>
+            <a:ext cx="7772400" cy="1470025"/>
+          </a:xfrm>
+        </p:spPr>
+        <p:txBody>
+          <a:bodyPr/>
+          <a:lstStyle/>
+          <a:p>
+            <a:r>
+              <a:rPr lang="en-US" smtClean="0"/>
+              <a:t>Click to edit Master title style</a:t>
             </a:r>
             <a:endParaRPr lang="en-US"/>
           </a:p>
@@ -2397,8 +2359,8 @@
         </p:nvSpPr>
         <p:spPr>
           <a:xfrm>
-            <a:off x="1828800" y="4322446"/>
-            <a:ext cx="10972800" cy="1986914"/>
+            <a:off x="1371600" y="3886200"/>
+            <a:ext cx="6400800" cy="1752600"/>
           </a:xfrm>
         </p:spPr>
         <p:txBody>
@@ -2406,45 +2368,99 @@
           <a:lstStyle>
             <a:lvl1pPr marL="0" indent="0" algn="ctr">
               <a:buNone/>
-              <a:defRPr sz="2880"/>
+              <a:defRPr>
+                <a:solidFill>
+                  <a:schemeClr val="tx1">
+                    <a:tint val="75000"/>
+                  </a:schemeClr>
+                </a:solidFill>
+              </a:defRPr>
             </a:lvl1pPr>
-            <a:lvl2pPr marL="548640" indent="0" algn="ctr">
+            <a:lvl2pPr marL="457200" indent="0" algn="ctr">
               <a:buNone/>
-              <a:defRPr sz="2400"/>
+              <a:defRPr>
+                <a:solidFill>
+                  <a:schemeClr val="tx1">
+                    <a:tint val="75000"/>
+                  </a:schemeClr>
+                </a:solidFill>
+              </a:defRPr>
             </a:lvl2pPr>
-            <a:lvl3pPr marL="1097280" indent="0" algn="ctr">
+            <a:lvl3pPr marL="914400" indent="0" algn="ctr">
               <a:buNone/>
-              <a:defRPr sz="2160"/>
+              <a:defRPr>
+                <a:solidFill>
+                  <a:schemeClr val="tx1">
+                    <a:tint val="75000"/>
+                  </a:schemeClr>
+                </a:solidFill>
+              </a:defRPr>
             </a:lvl3pPr>
-            <a:lvl4pPr marL="1645920" indent="0" algn="ctr">
+            <a:lvl4pPr marL="1371600" indent="0" algn="ctr">
               <a:buNone/>
-              <a:defRPr sz="1920"/>
+              <a:defRPr>
+                <a:solidFill>
+                  <a:schemeClr val="tx1">
+                    <a:tint val="75000"/>
+                  </a:schemeClr>
+                </a:solidFill>
+              </a:defRPr>
             </a:lvl4pPr>
-            <a:lvl5pPr marL="2194560" indent="0" algn="ctr">
+            <a:lvl5pPr marL="1828800" indent="0" algn="ctr">
               <a:buNone/>
-              <a:defRPr sz="1920"/>
+              <a:defRPr>
+                <a:solidFill>
+                  <a:schemeClr val="tx1">
+                    <a:tint val="75000"/>
+                  </a:schemeClr>
+                </a:solidFill>
+              </a:defRPr>
             </a:lvl5pPr>
-            <a:lvl6pPr marL="2743200" indent="0" algn="ctr">
+            <a:lvl6pPr marL="2286000" indent="0" algn="ctr">
               <a:buNone/>
-              <a:defRPr sz="1920"/>
+              <a:defRPr>
+                <a:solidFill>
+                  <a:schemeClr val="tx1">
+                    <a:tint val="75000"/>
+                  </a:schemeClr>
+                </a:solidFill>
+              </a:defRPr>
             </a:lvl6pPr>
-            <a:lvl7pPr marL="3291840" indent="0" algn="ctr">
+            <a:lvl7pPr marL="2743200" indent="0" algn="ctr">
               <a:buNone/>
-              <a:defRPr sz="1920"/>
+              <a:defRPr>
+                <a:solidFill>
+                  <a:schemeClr val="tx1">
+                    <a:tint val="75000"/>
+                  </a:schemeClr>
+                </a:solidFill>
+              </a:defRPr>
             </a:lvl7pPr>
-            <a:lvl8pPr marL="3840480" indent="0" algn="ctr">
+            <a:lvl8pPr marL="3200400" indent="0" algn="ctr">
               <a:buNone/>
-              <a:defRPr sz="1920"/>
+              <a:defRPr>
+                <a:solidFill>
+                  <a:schemeClr val="tx1">
+                    <a:tint val="75000"/>
+                  </a:schemeClr>
+                </a:solidFill>
+              </a:defRPr>
             </a:lvl8pPr>
-            <a:lvl9pPr marL="4389120" indent="0" algn="ctr">
+            <a:lvl9pPr marL="3657600" indent="0" algn="ctr">
               <a:buNone/>
-              <a:defRPr sz="1920"/>
+              <a:defRPr>
+                <a:solidFill>
+                  <a:schemeClr val="tx1">
+                    <a:tint val="75000"/>
+                  </a:schemeClr>
+                </a:solidFill>
+              </a:defRPr>
             </a:lvl9pPr>
           </a:lstStyle>
           <a:p>
             <a:r>
-              <a:rPr lang="ja-JP" altLang="en-US"/>
-              <a:t>マスター サブタイトルの書式設定</a:t>
+              <a:rPr lang="en-US" smtClean="0"/>
+              <a:t>Click to edit Master subtitle style</a:t>
             </a:r>
             <a:endParaRPr lang="en-US"/>
           </a:p>
@@ -2465,11 +2481,11 @@
           <a:bodyPr/>
           <a:lstStyle/>
           <a:p>
-            <a:fld id="{85690E6B-4BB1-4271-8845-BA9C3C8A619E}" type="datetime1">
-              <a:rPr kumimoji="1" lang="ja-JP" altLang="en-US" smtClean="0"/>
-              <a:t>2026/10/6</a:t>
+            <a:fld id="{5BCAD085-E8A6-8845-BD4E-CB4CCA059FC4}" type="datetimeFigureOut">
+              <a:rPr lang="en-US" smtClean="0"/>
+              <a:t>1/27/13</a:t>
             </a:fld>
-            <a:endParaRPr kumimoji="1" lang="ja-JP" altLang="en-US"/>
+            <a:endParaRPr lang="en-US"/>
           </a:p>
         </p:txBody>
       </p:sp>
@@ -2488,7 +2504,7 @@
           <a:bodyPr/>
           <a:lstStyle/>
           <a:p>
-            <a:endParaRPr kumimoji="1" lang="ja-JP" altLang="en-US"/>
+            <a:endParaRPr lang="en-US"/>
           </a:p>
         </p:txBody>
       </p:sp>
@@ -2507,18 +2523,18 @@
           <a:bodyPr/>
           <a:lstStyle/>
           <a:p>
-            <a:fld id="{B261DCAA-373B-405C-9828-CC1EDAA61144}" type="slidenum">
-              <a:rPr kumimoji="1" lang="ja-JP" altLang="en-US" smtClean="0"/>
+            <a:fld id="{C1FF6DA9-008F-8B48-92A6-B652298478BF}" type="slidenum">
+              <a:rPr lang="en-US" smtClean="0"/>
               <a:t>‹#›</a:t>
             </a:fld>
-            <a:endParaRPr kumimoji="1" lang="ja-JP" altLang="en-US"/>
+            <a:endParaRPr lang="en-US"/>
           </a:p>
         </p:txBody>
       </p:sp>
     </p:spTree>
     <p:extLst>
       <p:ext uri="{BB962C8B-B14F-4D97-AF65-F5344CB8AC3E}">
-        <p14:creationId xmlns:p14="http://schemas.microsoft.com/office/powerpoint/2010/main" val="3450271429"/>
+        <p14:creationId xmlns:p14="http://schemas.microsoft.com/office/powerpoint/2010/main" val="3168075583"/>
       </p:ext>
     </p:extLst>
   </p:cSld>
@@ -2530,7 +2546,7 @@
 
 <file path=ppt/slideLayouts/slideLayout10.xml><?xml version="1.0" encoding="utf-8"?>
 <p:sldLayout xmlns:a="http://schemas.openxmlformats.org/drawingml/2006/main" xmlns:r="http://schemas.openxmlformats.org/officeDocument/2006/relationships" xmlns:p="http://schemas.openxmlformats.org/presentationml/2006/main" type="vertTx" preserve="1">
-  <p:cSld name="タイトルと縦書きテキスト">
+  <p:cSld name="Title and Vertical Text">
     <p:spTree>
       <p:nvGrpSpPr>
         <p:cNvPr id="1" name=""/>
@@ -2561,8 +2577,8 @@
           <a:lstStyle/>
           <a:p>
             <a:r>
-              <a:rPr lang="ja-JP" altLang="en-US"/>
-              <a:t>マスター タイトルの書式設定</a:t>
+              <a:rPr lang="en-US" smtClean="0"/>
+              <a:t>Click to edit Master title style</a:t>
             </a:r>
             <a:endParaRPr lang="en-US"/>
           </a:p>
@@ -2585,68 +2601,36 @@
           <a:p>
             <a:pPr lvl="0"/>
             <a:r>
-              <a:rPr lang="ja-JP" altLang="en-US"/>
-              <a:t>マスター テキストの書式設定</a:t>
+              <a:rPr lang="en-US" smtClean="0"/>
+              <a:t>Click to edit Master text styles</a:t>
             </a:r>
           </a:p>
           <a:p>
             <a:pPr lvl="1"/>
             <a:r>
-              <a:rPr lang="ja-JP" altLang="en-US"/>
-              <a:t>第 </a:t>
-            </a:r>
-            <a:r>
-              <a:rPr lang="en-US" altLang="ja-JP"/>
-              <a:t>2 </a:t>
-            </a:r>
-            <a:r>
-              <a:rPr lang="ja-JP" altLang="en-US"/>
-              <a:t>レベル</a:t>
+              <a:rPr lang="en-US" smtClean="0"/>
+              <a:t>Second level</a:t>
             </a:r>
           </a:p>
           <a:p>
             <a:pPr lvl="2"/>
             <a:r>
-              <a:rPr lang="ja-JP" altLang="en-US"/>
-              <a:t>第 </a:t>
-            </a:r>
-            <a:r>
-              <a:rPr lang="en-US" altLang="ja-JP"/>
-              <a:t>3 </a:t>
-            </a:r>
-            <a:r>
-              <a:rPr lang="ja-JP" altLang="en-US"/>
-              <a:t>レベル</a:t>
+              <a:rPr lang="en-US" smtClean="0"/>
+              <a:t>Third level</a:t>
             </a:r>
           </a:p>
           <a:p>
             <a:pPr lvl="3"/>
             <a:r>
-              <a:rPr lang="ja-JP" altLang="en-US"/>
-              <a:t>第 </a:t>
-            </a:r>
-            <a:r>
-              <a:rPr lang="en-US" altLang="ja-JP"/>
-              <a:t>4 </a:t>
-            </a:r>
-            <a:r>
-              <a:rPr lang="ja-JP" altLang="en-US"/>
-              <a:t>レベル</a:t>
+              <a:rPr lang="en-US" smtClean="0"/>
+              <a:t>Fourth level</a:t>
             </a:r>
           </a:p>
           <a:p>
             <a:pPr lvl="4"/>
             <a:r>
-              <a:rPr lang="ja-JP" altLang="en-US"/>
-              <a:t>第 </a:t>
-            </a:r>
-            <a:r>
-              <a:rPr lang="en-US" altLang="ja-JP"/>
-              <a:t>5 </a:t>
-            </a:r>
-            <a:r>
-              <a:rPr lang="ja-JP" altLang="en-US"/>
-              <a:t>レベル</a:t>
+              <a:rPr lang="en-US" smtClean="0"/>
+              <a:t>Fifth level</a:t>
             </a:r>
             <a:endParaRPr lang="en-US"/>
           </a:p>
@@ -2667,11 +2651,11 @@
           <a:bodyPr/>
           <a:lstStyle/>
           <a:p>
-            <a:fld id="{47266A17-C47F-437F-BD9D-C88BA077159B}" type="datetime1">
-              <a:rPr kumimoji="1" lang="ja-JP" altLang="en-US" smtClean="0"/>
-              <a:t>2026/10/6</a:t>
+            <a:fld id="{5BCAD085-E8A6-8845-BD4E-CB4CCA059FC4}" type="datetimeFigureOut">
+              <a:rPr lang="en-US" smtClean="0"/>
+              <a:t>1/27/13</a:t>
             </a:fld>
-            <a:endParaRPr kumimoji="1" lang="ja-JP" altLang="en-US"/>
+            <a:endParaRPr lang="en-US"/>
           </a:p>
         </p:txBody>
       </p:sp>
@@ -2690,7 +2674,7 @@
           <a:bodyPr/>
           <a:lstStyle/>
           <a:p>
-            <a:endParaRPr kumimoji="1" lang="ja-JP" altLang="en-US"/>
+            <a:endParaRPr lang="en-US"/>
           </a:p>
         </p:txBody>
       </p:sp>
@@ -2709,18 +2693,18 @@
           <a:bodyPr/>
           <a:lstStyle/>
           <a:p>
-            <a:fld id="{B261DCAA-373B-405C-9828-CC1EDAA61144}" type="slidenum">
-              <a:rPr kumimoji="1" lang="ja-JP" altLang="en-US" smtClean="0"/>
+            <a:fld id="{C1FF6DA9-008F-8B48-92A6-B652298478BF}" type="slidenum">
+              <a:rPr lang="en-US" smtClean="0"/>
               <a:t>‹#›</a:t>
             </a:fld>
-            <a:endParaRPr kumimoji="1" lang="ja-JP" altLang="en-US"/>
+            <a:endParaRPr lang="en-US"/>
           </a:p>
         </p:txBody>
       </p:sp>
     </p:spTree>
     <p:extLst>
       <p:ext uri="{BB962C8B-B14F-4D97-AF65-F5344CB8AC3E}">
-        <p14:creationId xmlns:p14="http://schemas.microsoft.com/office/powerpoint/2010/main" val="2565137848"/>
+        <p14:creationId xmlns:p14="http://schemas.microsoft.com/office/powerpoint/2010/main" val="2910927964"/>
       </p:ext>
     </p:extLst>
   </p:cSld>
@@ -2732,7 +2716,7 @@
 
 <file path=ppt/slideLayouts/slideLayout11.xml><?xml version="1.0" encoding="utf-8"?>
 <p:sldLayout xmlns:a="http://schemas.openxmlformats.org/drawingml/2006/main" xmlns:r="http://schemas.openxmlformats.org/officeDocument/2006/relationships" xmlns:p="http://schemas.openxmlformats.org/presentationml/2006/main" type="vertTitleAndTx" preserve="1">
-  <p:cSld name="縦書きタイトルと&#10;縦書きテキスト">
+  <p:cSld name="Vertical Title and Text">
     <p:spTree>
       <p:nvGrpSpPr>
         <p:cNvPr id="1" name=""/>
@@ -2759,8 +2743,8 @@
         </p:nvSpPr>
         <p:spPr>
           <a:xfrm>
-            <a:off x="10469880" y="438150"/>
-            <a:ext cx="3154680" cy="6974206"/>
+            <a:off x="6629400" y="274638"/>
+            <a:ext cx="2057400" cy="5851525"/>
           </a:xfrm>
         </p:spPr>
         <p:txBody>
@@ -2768,8 +2752,8 @@
           <a:lstStyle/>
           <a:p>
             <a:r>
-              <a:rPr lang="ja-JP" altLang="en-US"/>
-              <a:t>マスター タイトルの書式設定</a:t>
+              <a:rPr lang="en-US" smtClean="0"/>
+              <a:t>Click to edit Master title style</a:t>
             </a:r>
             <a:endParaRPr lang="en-US"/>
           </a:p>
@@ -2787,8 +2771,8 @@
         </p:nvSpPr>
         <p:spPr>
           <a:xfrm>
-            <a:off x="1005840" y="438150"/>
-            <a:ext cx="9281160" cy="6974206"/>
+            <a:off x="457200" y="274638"/>
+            <a:ext cx="6019800" cy="5851525"/>
           </a:xfrm>
         </p:spPr>
         <p:txBody>
@@ -2797,68 +2781,36 @@
           <a:p>
             <a:pPr lvl="0"/>
             <a:r>
-              <a:rPr lang="ja-JP" altLang="en-US"/>
-              <a:t>マスター テキストの書式設定</a:t>
+              <a:rPr lang="en-US" smtClean="0"/>
+              <a:t>Click to edit Master text styles</a:t>
             </a:r>
           </a:p>
           <a:p>
             <a:pPr lvl="1"/>
             <a:r>
-              <a:rPr lang="ja-JP" altLang="en-US"/>
-              <a:t>第 </a:t>
-            </a:r>
-            <a:r>
-              <a:rPr lang="en-US" altLang="ja-JP"/>
-              <a:t>2 </a:t>
-            </a:r>
-            <a:r>
-              <a:rPr lang="ja-JP" altLang="en-US"/>
-              <a:t>レベル</a:t>
+              <a:rPr lang="en-US" smtClean="0"/>
+              <a:t>Second level</a:t>
             </a:r>
           </a:p>
           <a:p>
             <a:pPr lvl="2"/>
             <a:r>
-              <a:rPr lang="ja-JP" altLang="en-US"/>
-              <a:t>第 </a:t>
-            </a:r>
-            <a:r>
-              <a:rPr lang="en-US" altLang="ja-JP"/>
-              <a:t>3 </a:t>
-            </a:r>
-            <a:r>
-              <a:rPr lang="ja-JP" altLang="en-US"/>
-              <a:t>レベル</a:t>
+              <a:rPr lang="en-US" smtClean="0"/>
+              <a:t>Third level</a:t>
             </a:r>
           </a:p>
           <a:p>
             <a:pPr lvl="3"/>
             <a:r>
-              <a:rPr lang="ja-JP" altLang="en-US"/>
-              <a:t>第 </a:t>
-            </a:r>
-            <a:r>
-              <a:rPr lang="en-US" altLang="ja-JP"/>
-              <a:t>4 </a:t>
-            </a:r>
-            <a:r>
-              <a:rPr lang="ja-JP" altLang="en-US"/>
-              <a:t>レベル</a:t>
+              <a:rPr lang="en-US" smtClean="0"/>
+              <a:t>Fourth level</a:t>
             </a:r>
           </a:p>
           <a:p>
             <a:pPr lvl="4"/>
             <a:r>
-              <a:rPr lang="ja-JP" altLang="en-US"/>
-              <a:t>第 </a:t>
-            </a:r>
-            <a:r>
-              <a:rPr lang="en-US" altLang="ja-JP"/>
-              <a:t>5 </a:t>
-            </a:r>
-            <a:r>
-              <a:rPr lang="ja-JP" altLang="en-US"/>
-              <a:t>レベル</a:t>
+              <a:rPr lang="en-US" smtClean="0"/>
+              <a:t>Fifth level</a:t>
             </a:r>
             <a:endParaRPr lang="en-US"/>
           </a:p>
@@ -2879,11 +2831,11 @@
           <a:bodyPr/>
           <a:lstStyle/>
           <a:p>
-            <a:fld id="{BB4478A3-1BFB-4A9A-A22B-2BBA94D1875A}" type="datetime1">
-              <a:rPr kumimoji="1" lang="ja-JP" altLang="en-US" smtClean="0"/>
-              <a:t>2026/10/6</a:t>
+            <a:fld id="{5BCAD085-E8A6-8845-BD4E-CB4CCA059FC4}" type="datetimeFigureOut">
+              <a:rPr lang="en-US" smtClean="0"/>
+              <a:t>1/27/13</a:t>
             </a:fld>
-            <a:endParaRPr kumimoji="1" lang="ja-JP" altLang="en-US"/>
+            <a:endParaRPr lang="en-US"/>
           </a:p>
         </p:txBody>
       </p:sp>
@@ -2902,7 +2854,7 @@
           <a:bodyPr/>
           <a:lstStyle/>
           <a:p>
-            <a:endParaRPr kumimoji="1" lang="ja-JP" altLang="en-US"/>
+            <a:endParaRPr lang="en-US"/>
           </a:p>
         </p:txBody>
       </p:sp>
@@ -2921,18 +2873,18 @@
           <a:bodyPr/>
           <a:lstStyle/>
           <a:p>
-            <a:fld id="{B261DCAA-373B-405C-9828-CC1EDAA61144}" type="slidenum">
-              <a:rPr kumimoji="1" lang="ja-JP" altLang="en-US" smtClean="0"/>
+            <a:fld id="{C1FF6DA9-008F-8B48-92A6-B652298478BF}" type="slidenum">
+              <a:rPr lang="en-US" smtClean="0"/>
               <a:t>‹#›</a:t>
             </a:fld>
-            <a:endParaRPr kumimoji="1" lang="ja-JP" altLang="en-US"/>
+            <a:endParaRPr lang="en-US"/>
           </a:p>
         </p:txBody>
       </p:sp>
     </p:spTree>
     <p:extLst>
       <p:ext uri="{BB962C8B-B14F-4D97-AF65-F5344CB8AC3E}">
-        <p14:creationId xmlns:p14="http://schemas.microsoft.com/office/powerpoint/2010/main" val="100569667"/>
+        <p14:creationId xmlns:p14="http://schemas.microsoft.com/office/powerpoint/2010/main" val="3612223792"/>
       </p:ext>
     </p:extLst>
   </p:cSld>
@@ -2944,7 +2896,7 @@
 
 <file path=ppt/slideLayouts/slideLayout2.xml><?xml version="1.0" encoding="utf-8"?>
 <p:sldLayout xmlns:a="http://schemas.openxmlformats.org/drawingml/2006/main" xmlns:r="http://schemas.openxmlformats.org/officeDocument/2006/relationships" xmlns:p="http://schemas.openxmlformats.org/presentationml/2006/main" type="obj" preserve="1">
-  <p:cSld name="タイトルとコンテンツ">
+  <p:cSld name="Title and Content">
     <p:spTree>
       <p:nvGrpSpPr>
         <p:cNvPr id="1" name=""/>
@@ -2975,8 +2927,8 @@
           <a:lstStyle/>
           <a:p>
             <a:r>
-              <a:rPr lang="ja-JP" altLang="en-US"/>
-              <a:t>マスター タイトルの書式設定</a:t>
+              <a:rPr lang="en-US" smtClean="0"/>
+              <a:t>Click to edit Master title style</a:t>
             </a:r>
             <a:endParaRPr lang="en-US"/>
           </a:p>
@@ -2999,68 +2951,36 @@
           <a:p>
             <a:pPr lvl="0"/>
             <a:r>
-              <a:rPr lang="ja-JP" altLang="en-US"/>
-              <a:t>マスター テキストの書式設定</a:t>
+              <a:rPr lang="en-US" smtClean="0"/>
+              <a:t>Click to edit Master text styles</a:t>
             </a:r>
           </a:p>
           <a:p>
             <a:pPr lvl="1"/>
             <a:r>
-              <a:rPr lang="ja-JP" altLang="en-US"/>
-              <a:t>第 </a:t>
-            </a:r>
-            <a:r>
-              <a:rPr lang="en-US" altLang="ja-JP"/>
-              <a:t>2 </a:t>
-            </a:r>
-            <a:r>
-              <a:rPr lang="ja-JP" altLang="en-US"/>
-              <a:t>レベル</a:t>
+              <a:rPr lang="en-US" smtClean="0"/>
+              <a:t>Second level</a:t>
             </a:r>
           </a:p>
           <a:p>
             <a:pPr lvl="2"/>
             <a:r>
-              <a:rPr lang="ja-JP" altLang="en-US"/>
-              <a:t>第 </a:t>
-            </a:r>
-            <a:r>
-              <a:rPr lang="en-US" altLang="ja-JP"/>
-              <a:t>3 </a:t>
-            </a:r>
-            <a:r>
-              <a:rPr lang="ja-JP" altLang="en-US"/>
-              <a:t>レベル</a:t>
+              <a:rPr lang="en-US" smtClean="0"/>
+              <a:t>Third level</a:t>
             </a:r>
           </a:p>
           <a:p>
             <a:pPr lvl="3"/>
             <a:r>
-              <a:rPr lang="ja-JP" altLang="en-US"/>
-              <a:t>第 </a:t>
-            </a:r>
-            <a:r>
-              <a:rPr lang="en-US" altLang="ja-JP"/>
-              <a:t>4 </a:t>
-            </a:r>
-            <a:r>
-              <a:rPr lang="ja-JP" altLang="en-US"/>
-              <a:t>レベル</a:t>
+              <a:rPr lang="en-US" smtClean="0"/>
+              <a:t>Fourth level</a:t>
             </a:r>
           </a:p>
           <a:p>
             <a:pPr lvl="4"/>
             <a:r>
-              <a:rPr lang="ja-JP" altLang="en-US"/>
-              <a:t>第 </a:t>
-            </a:r>
-            <a:r>
-              <a:rPr lang="en-US" altLang="ja-JP"/>
-              <a:t>5 </a:t>
-            </a:r>
-            <a:r>
-              <a:rPr lang="ja-JP" altLang="en-US"/>
-              <a:t>レベル</a:t>
+              <a:rPr lang="en-US" smtClean="0"/>
+              <a:t>Fifth level</a:t>
             </a:r>
             <a:endParaRPr lang="en-US"/>
           </a:p>
@@ -3081,11 +3001,11 @@
           <a:bodyPr/>
           <a:lstStyle/>
           <a:p>
-            <a:fld id="{BD346860-368A-46B3-91AE-1EFDCE46A6F8}" type="datetime1">
-              <a:rPr kumimoji="1" lang="ja-JP" altLang="en-US" smtClean="0"/>
-              <a:t>2026/10/6</a:t>
+            <a:fld id="{5BCAD085-E8A6-8845-BD4E-CB4CCA059FC4}" type="datetimeFigureOut">
+              <a:rPr lang="en-US" smtClean="0"/>
+              <a:t>1/27/13</a:t>
             </a:fld>
-            <a:endParaRPr kumimoji="1" lang="ja-JP" altLang="en-US"/>
+            <a:endParaRPr lang="en-US"/>
           </a:p>
         </p:txBody>
       </p:sp>
@@ -3104,7 +3024,7 @@
           <a:bodyPr/>
           <a:lstStyle/>
           <a:p>
-            <a:endParaRPr kumimoji="1" lang="ja-JP" altLang="en-US"/>
+            <a:endParaRPr lang="en-US"/>
           </a:p>
         </p:txBody>
       </p:sp>
@@ -3123,18 +3043,18 @@
           <a:bodyPr/>
           <a:lstStyle/>
           <a:p>
-            <a:fld id="{B261DCAA-373B-405C-9828-CC1EDAA61144}" type="slidenum">
-              <a:rPr kumimoji="1" lang="ja-JP" altLang="en-US" smtClean="0"/>
+            <a:fld id="{C1FF6DA9-008F-8B48-92A6-B652298478BF}" type="slidenum">
+              <a:rPr lang="en-US" smtClean="0"/>
               <a:t>‹#›</a:t>
             </a:fld>
-            <a:endParaRPr kumimoji="1" lang="ja-JP" altLang="en-US"/>
+            <a:endParaRPr lang="en-US"/>
           </a:p>
         </p:txBody>
       </p:sp>
     </p:spTree>
     <p:extLst>
       <p:ext uri="{BB962C8B-B14F-4D97-AF65-F5344CB8AC3E}">
-        <p14:creationId xmlns:p14="http://schemas.microsoft.com/office/powerpoint/2010/main" val="179479079"/>
+        <p14:creationId xmlns:p14="http://schemas.microsoft.com/office/powerpoint/2010/main" val="2614314258"/>
       </p:ext>
     </p:extLst>
   </p:cSld>
@@ -3146,7 +3066,7 @@
 
 <file path=ppt/slideLayouts/slideLayout3.xml><?xml version="1.0" encoding="utf-8"?>
 <p:sldLayout xmlns:a="http://schemas.openxmlformats.org/drawingml/2006/main" xmlns:r="http://schemas.openxmlformats.org/officeDocument/2006/relationships" xmlns:p="http://schemas.openxmlformats.org/presentationml/2006/main" type="secHead" preserve="1">
-  <p:cSld name="セクション見出し">
+  <p:cSld name="Section Header">
     <p:spTree>
       <p:nvGrpSpPr>
         <p:cNvPr id="1" name=""/>
@@ -3173,21 +3093,21 @@
         </p:nvSpPr>
         <p:spPr>
           <a:xfrm>
-            <a:off x="998220" y="2051686"/>
-            <a:ext cx="12618720" cy="3423284"/>
-          </a:xfrm>
-        </p:spPr>
-        <p:txBody>
-          <a:bodyPr anchor="b"/>
+            <a:off x="722313" y="4406900"/>
+            <a:ext cx="7772400" cy="1362075"/>
+          </a:xfrm>
+        </p:spPr>
+        <p:txBody>
+          <a:bodyPr anchor="t"/>
           <a:lstStyle>
-            <a:lvl1pPr>
-              <a:defRPr sz="7200"/>
+            <a:lvl1pPr algn="l">
+              <a:defRPr sz="4000" b="1" cap="all"/>
             </a:lvl1pPr>
           </a:lstStyle>
           <a:p>
             <a:r>
-              <a:rPr lang="ja-JP" altLang="en-US"/>
-              <a:t>マスター タイトルの書式設定</a:t>
+              <a:rPr lang="en-US" smtClean="0"/>
+              <a:t>Click to edit Master title style</a:t>
             </a:r>
             <a:endParaRPr lang="en-US"/>
           </a:p>
@@ -3205,16 +3125,16 @@
         </p:nvSpPr>
         <p:spPr>
           <a:xfrm>
-            <a:off x="998220" y="5507356"/>
-            <a:ext cx="12618720" cy="1800224"/>
-          </a:xfrm>
-        </p:spPr>
-        <p:txBody>
-          <a:bodyPr/>
+            <a:off x="722313" y="2906713"/>
+            <a:ext cx="7772400" cy="1500187"/>
+          </a:xfrm>
+        </p:spPr>
+        <p:txBody>
+          <a:bodyPr anchor="b"/>
           <a:lstStyle>
             <a:lvl1pPr marL="0" indent="0">
               <a:buNone/>
-              <a:defRPr sz="2880">
+              <a:defRPr sz="2000">
                 <a:solidFill>
                   <a:schemeClr val="tx1">
                     <a:tint val="75000"/>
@@ -3222,9 +3142,9 @@
                 </a:solidFill>
               </a:defRPr>
             </a:lvl1pPr>
-            <a:lvl2pPr marL="548640" indent="0">
+            <a:lvl2pPr marL="457200" indent="0">
               <a:buNone/>
-              <a:defRPr sz="2400">
+              <a:defRPr sz="1800">
                 <a:solidFill>
                   <a:schemeClr val="tx1">
                     <a:tint val="75000"/>
@@ -3232,9 +3152,9 @@
                 </a:solidFill>
               </a:defRPr>
             </a:lvl2pPr>
-            <a:lvl3pPr marL="1097280" indent="0">
+            <a:lvl3pPr marL="914400" indent="0">
               <a:buNone/>
-              <a:defRPr sz="2160">
+              <a:defRPr sz="1600">
                 <a:solidFill>
                   <a:schemeClr val="tx1">
                     <a:tint val="75000"/>
@@ -3242,9 +3162,9 @@
                 </a:solidFill>
               </a:defRPr>
             </a:lvl3pPr>
-            <a:lvl4pPr marL="1645920" indent="0">
+            <a:lvl4pPr marL="1371600" indent="0">
               <a:buNone/>
-              <a:defRPr sz="1920">
+              <a:defRPr sz="1400">
                 <a:solidFill>
                   <a:schemeClr val="tx1">
                     <a:tint val="75000"/>
@@ -3252,9 +3172,9 @@
                 </a:solidFill>
               </a:defRPr>
             </a:lvl4pPr>
-            <a:lvl5pPr marL="2194560" indent="0">
+            <a:lvl5pPr marL="1828800" indent="0">
               <a:buNone/>
-              <a:defRPr sz="1920">
+              <a:defRPr sz="1400">
                 <a:solidFill>
                   <a:schemeClr val="tx1">
                     <a:tint val="75000"/>
@@ -3262,9 +3182,9 @@
                 </a:solidFill>
               </a:defRPr>
             </a:lvl5pPr>
-            <a:lvl6pPr marL="2743200" indent="0">
+            <a:lvl6pPr marL="2286000" indent="0">
               <a:buNone/>
-              <a:defRPr sz="1920">
+              <a:defRPr sz="1400">
                 <a:solidFill>
                   <a:schemeClr val="tx1">
                     <a:tint val="75000"/>
@@ -3272,9 +3192,9 @@
                 </a:solidFill>
               </a:defRPr>
             </a:lvl6pPr>
-            <a:lvl7pPr marL="3291840" indent="0">
+            <a:lvl7pPr marL="2743200" indent="0">
               <a:buNone/>
-              <a:defRPr sz="1920">
+              <a:defRPr sz="1400">
                 <a:solidFill>
                   <a:schemeClr val="tx1">
                     <a:tint val="75000"/>
@@ -3282,9 +3202,9 @@
                 </a:solidFill>
               </a:defRPr>
             </a:lvl7pPr>
-            <a:lvl8pPr marL="3840480" indent="0">
+            <a:lvl8pPr marL="3200400" indent="0">
               <a:buNone/>
-              <a:defRPr sz="1920">
+              <a:defRPr sz="1400">
                 <a:solidFill>
                   <a:schemeClr val="tx1">
                     <a:tint val="75000"/>
@@ -3292,9 +3212,9 @@
                 </a:solidFill>
               </a:defRPr>
             </a:lvl8pPr>
-            <a:lvl9pPr marL="4389120" indent="0">
+            <a:lvl9pPr marL="3657600" indent="0">
               <a:buNone/>
-              <a:defRPr sz="1920">
+              <a:defRPr sz="1400">
                 <a:solidFill>
                   <a:schemeClr val="tx1">
                     <a:tint val="75000"/>
@@ -3306,8 +3226,8 @@
           <a:p>
             <a:pPr lvl="0"/>
             <a:r>
-              <a:rPr lang="ja-JP" altLang="en-US"/>
-              <a:t>マスター テキストの書式設定</a:t>
+              <a:rPr lang="en-US" smtClean="0"/>
+              <a:t>Click to edit Master text styles</a:t>
             </a:r>
           </a:p>
         </p:txBody>
@@ -3327,11 +3247,11 @@
           <a:bodyPr/>
           <a:lstStyle/>
           <a:p>
-            <a:fld id="{4EF81853-CB38-48F5-9108-85F01A3BEF23}" type="datetime1">
-              <a:rPr kumimoji="1" lang="ja-JP" altLang="en-US" smtClean="0"/>
-              <a:t>2026/10/6</a:t>
+            <a:fld id="{5BCAD085-E8A6-8845-BD4E-CB4CCA059FC4}" type="datetimeFigureOut">
+              <a:rPr lang="en-US" smtClean="0"/>
+              <a:t>1/27/13</a:t>
             </a:fld>
-            <a:endParaRPr kumimoji="1" lang="ja-JP" altLang="en-US"/>
+            <a:endParaRPr lang="en-US"/>
           </a:p>
         </p:txBody>
       </p:sp>
@@ -3350,7 +3270,7 @@
           <a:bodyPr/>
           <a:lstStyle/>
           <a:p>
-            <a:endParaRPr kumimoji="1" lang="ja-JP" altLang="en-US"/>
+            <a:endParaRPr lang="en-US"/>
           </a:p>
         </p:txBody>
       </p:sp>
@@ -3369,18 +3289,18 @@
           <a:bodyPr/>
           <a:lstStyle/>
           <a:p>
-            <a:fld id="{B261DCAA-373B-405C-9828-CC1EDAA61144}" type="slidenum">
-              <a:rPr kumimoji="1" lang="ja-JP" altLang="en-US" smtClean="0"/>
+            <a:fld id="{C1FF6DA9-008F-8B48-92A6-B652298478BF}" type="slidenum">
+              <a:rPr lang="en-US" smtClean="0"/>
               <a:t>‹#›</a:t>
             </a:fld>
-            <a:endParaRPr kumimoji="1" lang="ja-JP" altLang="en-US"/>
+            <a:endParaRPr lang="en-US"/>
           </a:p>
         </p:txBody>
       </p:sp>
     </p:spTree>
     <p:extLst>
       <p:ext uri="{BB962C8B-B14F-4D97-AF65-F5344CB8AC3E}">
-        <p14:creationId xmlns:p14="http://schemas.microsoft.com/office/powerpoint/2010/main" val="440218194"/>
+        <p14:creationId xmlns:p14="http://schemas.microsoft.com/office/powerpoint/2010/main" val="960648375"/>
       </p:ext>
     </p:extLst>
   </p:cSld>
@@ -3392,7 +3312,7 @@
 
 <file path=ppt/slideLayouts/slideLayout4.xml><?xml version="1.0" encoding="utf-8"?>
 <p:sldLayout xmlns:a="http://schemas.openxmlformats.org/drawingml/2006/main" xmlns:r="http://schemas.openxmlformats.org/officeDocument/2006/relationships" xmlns:p="http://schemas.openxmlformats.org/presentationml/2006/main" type="twoObj" preserve="1">
-  <p:cSld name="2 つのコンテンツ">
+  <p:cSld name="Two Content">
     <p:spTree>
       <p:nvGrpSpPr>
         <p:cNvPr id="1" name=""/>
@@ -3423,8 +3343,8 @@
           <a:lstStyle/>
           <a:p>
             <a:r>
-              <a:rPr lang="ja-JP" altLang="en-US"/>
-              <a:t>マスター タイトルの書式設定</a:t>
+              <a:rPr lang="en-US" smtClean="0"/>
+              <a:t>Click to edit Master title style</a:t>
             </a:r>
             <a:endParaRPr lang="en-US"/>
           </a:p>
@@ -3442,78 +3362,74 @@
         </p:nvSpPr>
         <p:spPr>
           <a:xfrm>
-            <a:off x="1005840" y="2190750"/>
-            <a:ext cx="6217920" cy="5221606"/>
+            <a:off x="457200" y="1600200"/>
+            <a:ext cx="4038600" cy="4525963"/>
           </a:xfrm>
         </p:spPr>
         <p:txBody>
           <a:bodyPr/>
-          <a:lstStyle/>
+          <a:lstStyle>
+            <a:lvl1pPr>
+              <a:defRPr sz="2800"/>
+            </a:lvl1pPr>
+            <a:lvl2pPr>
+              <a:defRPr sz="2400"/>
+            </a:lvl2pPr>
+            <a:lvl3pPr>
+              <a:defRPr sz="2000"/>
+            </a:lvl3pPr>
+            <a:lvl4pPr>
+              <a:defRPr sz="1800"/>
+            </a:lvl4pPr>
+            <a:lvl5pPr>
+              <a:defRPr sz="1800"/>
+            </a:lvl5pPr>
+            <a:lvl6pPr>
+              <a:defRPr sz="1800"/>
+            </a:lvl6pPr>
+            <a:lvl7pPr>
+              <a:defRPr sz="1800"/>
+            </a:lvl7pPr>
+            <a:lvl8pPr>
+              <a:defRPr sz="1800"/>
+            </a:lvl8pPr>
+            <a:lvl9pPr>
+              <a:defRPr sz="1800"/>
+            </a:lvl9pPr>
+          </a:lstStyle>
           <a:p>
             <a:pPr lvl="0"/>
             <a:r>
-              <a:rPr lang="ja-JP" altLang="en-US"/>
-              <a:t>マスター テキストの書式設定</a:t>
+              <a:rPr lang="en-US" smtClean="0"/>
+              <a:t>Click to edit Master text styles</a:t>
             </a:r>
           </a:p>
           <a:p>
             <a:pPr lvl="1"/>
             <a:r>
-              <a:rPr lang="ja-JP" altLang="en-US"/>
-              <a:t>第 </a:t>
-            </a:r>
-            <a:r>
-              <a:rPr lang="en-US" altLang="ja-JP"/>
-              <a:t>2 </a:t>
-            </a:r>
-            <a:r>
-              <a:rPr lang="ja-JP" altLang="en-US"/>
-              <a:t>レベル</a:t>
+              <a:rPr lang="en-US" smtClean="0"/>
+              <a:t>Second level</a:t>
             </a:r>
           </a:p>
           <a:p>
             <a:pPr lvl="2"/>
             <a:r>
-              <a:rPr lang="ja-JP" altLang="en-US"/>
-              <a:t>第 </a:t>
-            </a:r>
-            <a:r>
-              <a:rPr lang="en-US" altLang="ja-JP"/>
-              <a:t>3 </a:t>
-            </a:r>
-            <a:r>
-              <a:rPr lang="ja-JP" altLang="en-US"/>
-              <a:t>レベル</a:t>
+              <a:rPr lang="en-US" smtClean="0"/>
+              <a:t>Third level</a:t>
             </a:r>
           </a:p>
           <a:p>
             <a:pPr lvl="3"/>
             <a:r>
-              <a:rPr lang="ja-JP" altLang="en-US"/>
-              <a:t>第 </a:t>
-            </a:r>
-            <a:r>
-              <a:rPr lang="en-US" altLang="ja-JP"/>
-              <a:t>4 </a:t>
-            </a:r>
-            <a:r>
-              <a:rPr lang="ja-JP" altLang="en-US"/>
-              <a:t>レベル</a:t>
+              <a:rPr lang="en-US" smtClean="0"/>
+              <a:t>Fourth level</a:t>
             </a:r>
           </a:p>
           <a:p>
             <a:pPr lvl="4"/>
             <a:r>
-              <a:rPr lang="ja-JP" altLang="en-US"/>
-              <a:t>第 </a:t>
-            </a:r>
-            <a:r>
-              <a:rPr lang="en-US" altLang="ja-JP"/>
-              <a:t>5 </a:t>
-            </a:r>
-            <a:r>
-              <a:rPr lang="ja-JP" altLang="en-US"/>
-              <a:t>レベル</a:t>
+              <a:rPr lang="en-US" smtClean="0"/>
+              <a:t>Fifth level</a:t>
             </a:r>
             <a:endParaRPr lang="en-US"/>
           </a:p>
@@ -3531,78 +3447,74 @@
         </p:nvSpPr>
         <p:spPr>
           <a:xfrm>
-            <a:off x="7406640" y="2190750"/>
-            <a:ext cx="6217920" cy="5221606"/>
+            <a:off x="4648200" y="1600200"/>
+            <a:ext cx="4038600" cy="4525963"/>
           </a:xfrm>
         </p:spPr>
         <p:txBody>
           <a:bodyPr/>
-          <a:lstStyle/>
+          <a:lstStyle>
+            <a:lvl1pPr>
+              <a:defRPr sz="2800"/>
+            </a:lvl1pPr>
+            <a:lvl2pPr>
+              <a:defRPr sz="2400"/>
+            </a:lvl2pPr>
+            <a:lvl3pPr>
+              <a:defRPr sz="2000"/>
+            </a:lvl3pPr>
+            <a:lvl4pPr>
+              <a:defRPr sz="1800"/>
+            </a:lvl4pPr>
+            <a:lvl5pPr>
+              <a:defRPr sz="1800"/>
+            </a:lvl5pPr>
+            <a:lvl6pPr>
+              <a:defRPr sz="1800"/>
+            </a:lvl6pPr>
+            <a:lvl7pPr>
+              <a:defRPr sz="1800"/>
+            </a:lvl7pPr>
+            <a:lvl8pPr>
+              <a:defRPr sz="1800"/>
+            </a:lvl8pPr>
+            <a:lvl9pPr>
+              <a:defRPr sz="1800"/>
+            </a:lvl9pPr>
+          </a:lstStyle>
           <a:p>
             <a:pPr lvl="0"/>
             <a:r>
-              <a:rPr lang="ja-JP" altLang="en-US"/>
-              <a:t>マスター テキストの書式設定</a:t>
+              <a:rPr lang="en-US" smtClean="0"/>
+              <a:t>Click to edit Master text styles</a:t>
             </a:r>
           </a:p>
           <a:p>
             <a:pPr lvl="1"/>
             <a:r>
-              <a:rPr lang="ja-JP" altLang="en-US"/>
-              <a:t>第 </a:t>
-            </a:r>
-            <a:r>
-              <a:rPr lang="en-US" altLang="ja-JP"/>
-              <a:t>2 </a:t>
-            </a:r>
-            <a:r>
-              <a:rPr lang="ja-JP" altLang="en-US"/>
-              <a:t>レベル</a:t>
+              <a:rPr lang="en-US" smtClean="0"/>
+              <a:t>Second level</a:t>
             </a:r>
           </a:p>
           <a:p>
             <a:pPr lvl="2"/>
             <a:r>
-              <a:rPr lang="ja-JP" altLang="en-US"/>
-              <a:t>第 </a:t>
-            </a:r>
-            <a:r>
-              <a:rPr lang="en-US" altLang="ja-JP"/>
-              <a:t>3 </a:t>
-            </a:r>
-            <a:r>
-              <a:rPr lang="ja-JP" altLang="en-US"/>
-              <a:t>レベル</a:t>
+              <a:rPr lang="en-US" smtClean="0"/>
+              <a:t>Third level</a:t>
             </a:r>
           </a:p>
           <a:p>
             <a:pPr lvl="3"/>
             <a:r>
-              <a:rPr lang="ja-JP" altLang="en-US"/>
-              <a:t>第 </a:t>
-            </a:r>
-            <a:r>
-              <a:rPr lang="en-US" altLang="ja-JP"/>
-              <a:t>4 </a:t>
-            </a:r>
-            <a:r>
-              <a:rPr lang="ja-JP" altLang="en-US"/>
-              <a:t>レベル</a:t>
+              <a:rPr lang="en-US" smtClean="0"/>
+              <a:t>Fourth level</a:t>
             </a:r>
           </a:p>
           <a:p>
             <a:pPr lvl="4"/>
             <a:r>
-              <a:rPr lang="ja-JP" altLang="en-US"/>
-              <a:t>第 </a:t>
-            </a:r>
-            <a:r>
-              <a:rPr lang="en-US" altLang="ja-JP"/>
-              <a:t>5 </a:t>
-            </a:r>
-            <a:r>
-              <a:rPr lang="ja-JP" altLang="en-US"/>
-              <a:t>レベル</a:t>
+              <a:rPr lang="en-US" smtClean="0"/>
+              <a:t>Fifth level</a:t>
             </a:r>
             <a:endParaRPr lang="en-US"/>
           </a:p>
@@ -3623,11 +3535,11 @@
           <a:bodyPr/>
           <a:lstStyle/>
           <a:p>
-            <a:fld id="{58313168-3286-46CE-9D8E-9F825EDE154C}" type="datetime1">
-              <a:rPr kumimoji="1" lang="ja-JP" altLang="en-US" smtClean="0"/>
-              <a:t>2026/10/6</a:t>
+            <a:fld id="{5BCAD085-E8A6-8845-BD4E-CB4CCA059FC4}" type="datetimeFigureOut">
+              <a:rPr lang="en-US" smtClean="0"/>
+              <a:t>1/27/13</a:t>
             </a:fld>
-            <a:endParaRPr kumimoji="1" lang="ja-JP" altLang="en-US"/>
+            <a:endParaRPr lang="en-US"/>
           </a:p>
         </p:txBody>
       </p:sp>
@@ -3646,7 +3558,7 @@
           <a:bodyPr/>
           <a:lstStyle/>
           <a:p>
-            <a:endParaRPr kumimoji="1" lang="ja-JP" altLang="en-US"/>
+            <a:endParaRPr lang="en-US"/>
           </a:p>
         </p:txBody>
       </p:sp>
@@ -3665,18 +3577,18 @@
           <a:bodyPr/>
           <a:lstStyle/>
           <a:p>
-            <a:fld id="{B261DCAA-373B-405C-9828-CC1EDAA61144}" type="slidenum">
-              <a:rPr kumimoji="1" lang="ja-JP" altLang="en-US" smtClean="0"/>
+            <a:fld id="{C1FF6DA9-008F-8B48-92A6-B652298478BF}" type="slidenum">
+              <a:rPr lang="en-US" smtClean="0"/>
               <a:t>‹#›</a:t>
             </a:fld>
-            <a:endParaRPr kumimoji="1" lang="ja-JP" altLang="en-US"/>
+            <a:endParaRPr lang="en-US"/>
           </a:p>
         </p:txBody>
       </p:sp>
     </p:spTree>
     <p:extLst>
       <p:ext uri="{BB962C8B-B14F-4D97-AF65-F5344CB8AC3E}">
-        <p14:creationId xmlns:p14="http://schemas.microsoft.com/office/powerpoint/2010/main" val="4177206622"/>
+        <p14:creationId xmlns:p14="http://schemas.microsoft.com/office/powerpoint/2010/main" val="2782244947"/>
       </p:ext>
     </p:extLst>
   </p:cSld>
@@ -3688,7 +3600,7 @@
 
 <file path=ppt/slideLayouts/slideLayout5.xml><?xml version="1.0" encoding="utf-8"?>
 <p:sldLayout xmlns:a="http://schemas.openxmlformats.org/drawingml/2006/main" xmlns:r="http://schemas.openxmlformats.org/officeDocument/2006/relationships" xmlns:p="http://schemas.openxmlformats.org/presentationml/2006/main" type="twoTxTwoObj" preserve="1">
-  <p:cSld name="比較">
+  <p:cSld name="Comparison">
     <p:spTree>
       <p:nvGrpSpPr>
         <p:cNvPr id="1" name=""/>
@@ -3713,19 +3625,18 @@
             <p:ph type="title"/>
           </p:nvPr>
         </p:nvSpPr>
-        <p:spPr>
-          <a:xfrm>
-            <a:off x="1007746" y="438150"/>
-            <a:ext cx="12618720" cy="1590676"/>
-          </a:xfrm>
-        </p:spPr>
+        <p:spPr/>
         <p:txBody>
           <a:bodyPr/>
-          <a:lstStyle/>
-          <a:p>
-            <a:r>
-              <a:rPr lang="ja-JP" altLang="en-US"/>
-              <a:t>マスター タイトルの書式設定</a:t>
+          <a:lstStyle>
+            <a:lvl1pPr>
+              <a:defRPr/>
+            </a:lvl1pPr>
+          </a:lstStyle>
+          <a:p>
+            <a:r>
+              <a:rPr lang="en-US" smtClean="0"/>
+              <a:t>Click to edit Master title style</a:t>
             </a:r>
             <a:endParaRPr lang="en-US"/>
           </a:p>
@@ -3743,8 +3654,8 @@
         </p:nvSpPr>
         <p:spPr>
           <a:xfrm>
-            <a:off x="1007746" y="2017396"/>
-            <a:ext cx="6189344" cy="988694"/>
+            <a:off x="457200" y="1535113"/>
+            <a:ext cx="4040188" cy="639762"/>
           </a:xfrm>
         </p:spPr>
         <p:txBody>
@@ -3752,46 +3663,46 @@
           <a:lstStyle>
             <a:lvl1pPr marL="0" indent="0">
               <a:buNone/>
-              <a:defRPr sz="2880" b="1"/>
+              <a:defRPr sz="2400" b="1"/>
             </a:lvl1pPr>
-            <a:lvl2pPr marL="548640" indent="0">
+            <a:lvl2pPr marL="457200" indent="0">
               <a:buNone/>
-              <a:defRPr sz="2400" b="1"/>
+              <a:defRPr sz="2000" b="1"/>
             </a:lvl2pPr>
-            <a:lvl3pPr marL="1097280" indent="0">
+            <a:lvl3pPr marL="914400" indent="0">
               <a:buNone/>
-              <a:defRPr sz="2160" b="1"/>
+              <a:defRPr sz="1800" b="1"/>
             </a:lvl3pPr>
-            <a:lvl4pPr marL="1645920" indent="0">
+            <a:lvl4pPr marL="1371600" indent="0">
               <a:buNone/>
-              <a:defRPr sz="1920" b="1"/>
+              <a:defRPr sz="1600" b="1"/>
             </a:lvl4pPr>
-            <a:lvl5pPr marL="2194560" indent="0">
+            <a:lvl5pPr marL="1828800" indent="0">
               <a:buNone/>
-              <a:defRPr sz="1920" b="1"/>
+              <a:defRPr sz="1600" b="1"/>
             </a:lvl5pPr>
-            <a:lvl6pPr marL="2743200" indent="0">
+            <a:lvl6pPr marL="2286000" indent="0">
               <a:buNone/>
-              <a:defRPr sz="1920" b="1"/>
+              <a:defRPr sz="1600" b="1"/>
             </a:lvl6pPr>
-            <a:lvl7pPr marL="3291840" indent="0">
+            <a:lvl7pPr marL="2743200" indent="0">
               <a:buNone/>
-              <a:defRPr sz="1920" b="1"/>
+              <a:defRPr sz="1600" b="1"/>
             </a:lvl7pPr>
-            <a:lvl8pPr marL="3840480" indent="0">
+            <a:lvl8pPr marL="3200400" indent="0">
               <a:buNone/>
-              <a:defRPr sz="1920" b="1"/>
+              <a:defRPr sz="1600" b="1"/>
             </a:lvl8pPr>
-            <a:lvl9pPr marL="4389120" indent="0">
+            <a:lvl9pPr marL="3657600" indent="0">
               <a:buNone/>
-              <a:defRPr sz="1920" b="1"/>
+              <a:defRPr sz="1600" b="1"/>
             </a:lvl9pPr>
           </a:lstStyle>
           <a:p>
             <a:pPr lvl="0"/>
             <a:r>
-              <a:rPr lang="ja-JP" altLang="en-US"/>
-              <a:t>マスター テキストの書式設定</a:t>
+              <a:rPr lang="en-US" smtClean="0"/>
+              <a:t>Click to edit Master text styles</a:t>
             </a:r>
           </a:p>
         </p:txBody>
@@ -3808,78 +3719,74 @@
         </p:nvSpPr>
         <p:spPr>
           <a:xfrm>
-            <a:off x="1007746" y="3006090"/>
-            <a:ext cx="6189344" cy="4421506"/>
+            <a:off x="457200" y="2174875"/>
+            <a:ext cx="4040188" cy="3951288"/>
           </a:xfrm>
         </p:spPr>
         <p:txBody>
           <a:bodyPr/>
-          <a:lstStyle/>
+          <a:lstStyle>
+            <a:lvl1pPr>
+              <a:defRPr sz="2400"/>
+            </a:lvl1pPr>
+            <a:lvl2pPr>
+              <a:defRPr sz="2000"/>
+            </a:lvl2pPr>
+            <a:lvl3pPr>
+              <a:defRPr sz="1800"/>
+            </a:lvl3pPr>
+            <a:lvl4pPr>
+              <a:defRPr sz="1600"/>
+            </a:lvl4pPr>
+            <a:lvl5pPr>
+              <a:defRPr sz="1600"/>
+            </a:lvl5pPr>
+            <a:lvl6pPr>
+              <a:defRPr sz="1600"/>
+            </a:lvl6pPr>
+            <a:lvl7pPr>
+              <a:defRPr sz="1600"/>
+            </a:lvl7pPr>
+            <a:lvl8pPr>
+              <a:defRPr sz="1600"/>
+            </a:lvl8pPr>
+            <a:lvl9pPr>
+              <a:defRPr sz="1600"/>
+            </a:lvl9pPr>
+          </a:lstStyle>
           <a:p>
             <a:pPr lvl="0"/>
             <a:r>
-              <a:rPr lang="ja-JP" altLang="en-US"/>
-              <a:t>マスター テキストの書式設定</a:t>
+              <a:rPr lang="en-US" smtClean="0"/>
+              <a:t>Click to edit Master text styles</a:t>
             </a:r>
           </a:p>
           <a:p>
             <a:pPr lvl="1"/>
             <a:r>
-              <a:rPr lang="ja-JP" altLang="en-US"/>
-              <a:t>第 </a:t>
-            </a:r>
-            <a:r>
-              <a:rPr lang="en-US" altLang="ja-JP"/>
-              <a:t>2 </a:t>
-            </a:r>
-            <a:r>
-              <a:rPr lang="ja-JP" altLang="en-US"/>
-              <a:t>レベル</a:t>
+              <a:rPr lang="en-US" smtClean="0"/>
+              <a:t>Second level</a:t>
             </a:r>
           </a:p>
           <a:p>
             <a:pPr lvl="2"/>
             <a:r>
-              <a:rPr lang="ja-JP" altLang="en-US"/>
-              <a:t>第 </a:t>
-            </a:r>
-            <a:r>
-              <a:rPr lang="en-US" altLang="ja-JP"/>
-              <a:t>3 </a:t>
-            </a:r>
-            <a:r>
-              <a:rPr lang="ja-JP" altLang="en-US"/>
-              <a:t>レベル</a:t>
+              <a:rPr lang="en-US" smtClean="0"/>
+              <a:t>Third level</a:t>
             </a:r>
           </a:p>
           <a:p>
             <a:pPr lvl="3"/>
             <a:r>
-              <a:rPr lang="ja-JP" altLang="en-US"/>
-              <a:t>第 </a:t>
-            </a:r>
-            <a:r>
-              <a:rPr lang="en-US" altLang="ja-JP"/>
-              <a:t>4 </a:t>
-            </a:r>
-            <a:r>
-              <a:rPr lang="ja-JP" altLang="en-US"/>
-              <a:t>レベル</a:t>
+              <a:rPr lang="en-US" smtClean="0"/>
+              <a:t>Fourth level</a:t>
             </a:r>
           </a:p>
           <a:p>
             <a:pPr lvl="4"/>
             <a:r>
-              <a:rPr lang="ja-JP" altLang="en-US"/>
-              <a:t>第 </a:t>
-            </a:r>
-            <a:r>
-              <a:rPr lang="en-US" altLang="ja-JP"/>
-              <a:t>5 </a:t>
-            </a:r>
-            <a:r>
-              <a:rPr lang="ja-JP" altLang="en-US"/>
-              <a:t>レベル</a:t>
+              <a:rPr lang="en-US" smtClean="0"/>
+              <a:t>Fifth level</a:t>
             </a:r>
             <a:endParaRPr lang="en-US"/>
           </a:p>
@@ -3897,8 +3804,8 @@
         </p:nvSpPr>
         <p:spPr>
           <a:xfrm>
-            <a:off x="7406640" y="2017396"/>
-            <a:ext cx="6219826" cy="988694"/>
+            <a:off x="4645025" y="1535113"/>
+            <a:ext cx="4041775" cy="639762"/>
           </a:xfrm>
         </p:spPr>
         <p:txBody>
@@ -3906,46 +3813,46 @@
           <a:lstStyle>
             <a:lvl1pPr marL="0" indent="0">
               <a:buNone/>
-              <a:defRPr sz="2880" b="1"/>
+              <a:defRPr sz="2400" b="1"/>
             </a:lvl1pPr>
-            <a:lvl2pPr marL="548640" indent="0">
+            <a:lvl2pPr marL="457200" indent="0">
               <a:buNone/>
-              <a:defRPr sz="2400" b="1"/>
+              <a:defRPr sz="2000" b="1"/>
             </a:lvl2pPr>
-            <a:lvl3pPr marL="1097280" indent="0">
+            <a:lvl3pPr marL="914400" indent="0">
               <a:buNone/>
-              <a:defRPr sz="2160" b="1"/>
+              <a:defRPr sz="1800" b="1"/>
             </a:lvl3pPr>
-            <a:lvl4pPr marL="1645920" indent="0">
+            <a:lvl4pPr marL="1371600" indent="0">
               <a:buNone/>
-              <a:defRPr sz="1920" b="1"/>
+              <a:defRPr sz="1600" b="1"/>
             </a:lvl4pPr>
-            <a:lvl5pPr marL="2194560" indent="0">
+            <a:lvl5pPr marL="1828800" indent="0">
               <a:buNone/>
-              <a:defRPr sz="1920" b="1"/>
+              <a:defRPr sz="1600" b="1"/>
             </a:lvl5pPr>
-            <a:lvl6pPr marL="2743200" indent="0">
+            <a:lvl6pPr marL="2286000" indent="0">
               <a:buNone/>
-              <a:defRPr sz="1920" b="1"/>
+              <a:defRPr sz="1600" b="1"/>
             </a:lvl6pPr>
-            <a:lvl7pPr marL="3291840" indent="0">
+            <a:lvl7pPr marL="2743200" indent="0">
               <a:buNone/>
-              <a:defRPr sz="1920" b="1"/>
+              <a:defRPr sz="1600" b="1"/>
             </a:lvl7pPr>
-            <a:lvl8pPr marL="3840480" indent="0">
+            <a:lvl8pPr marL="3200400" indent="0">
               <a:buNone/>
-              <a:defRPr sz="1920" b="1"/>
+              <a:defRPr sz="1600" b="1"/>
             </a:lvl8pPr>
-            <a:lvl9pPr marL="4389120" indent="0">
+            <a:lvl9pPr marL="3657600" indent="0">
               <a:buNone/>
-              <a:defRPr sz="1920" b="1"/>
+              <a:defRPr sz="1600" b="1"/>
             </a:lvl9pPr>
           </a:lstStyle>
           <a:p>
             <a:pPr lvl="0"/>
             <a:r>
-              <a:rPr lang="ja-JP" altLang="en-US"/>
-              <a:t>マスター テキストの書式設定</a:t>
+              <a:rPr lang="en-US" smtClean="0"/>
+              <a:t>Click to edit Master text styles</a:t>
             </a:r>
           </a:p>
         </p:txBody>
@@ -3962,78 +3869,74 @@
         </p:nvSpPr>
         <p:spPr>
           <a:xfrm>
-            <a:off x="7406640" y="3006090"/>
-            <a:ext cx="6219826" cy="4421506"/>
+            <a:off x="4645025" y="2174875"/>
+            <a:ext cx="4041775" cy="3951288"/>
           </a:xfrm>
         </p:spPr>
         <p:txBody>
           <a:bodyPr/>
-          <a:lstStyle/>
+          <a:lstStyle>
+            <a:lvl1pPr>
+              <a:defRPr sz="2400"/>
+            </a:lvl1pPr>
+            <a:lvl2pPr>
+              <a:defRPr sz="2000"/>
+            </a:lvl2pPr>
+            <a:lvl3pPr>
+              <a:defRPr sz="1800"/>
+            </a:lvl3pPr>
+            <a:lvl4pPr>
+              <a:defRPr sz="1600"/>
+            </a:lvl4pPr>
+            <a:lvl5pPr>
+              <a:defRPr sz="1600"/>
+            </a:lvl5pPr>
+            <a:lvl6pPr>
+              <a:defRPr sz="1600"/>
+            </a:lvl6pPr>
+            <a:lvl7pPr>
+              <a:defRPr sz="1600"/>
+            </a:lvl7pPr>
+            <a:lvl8pPr>
+              <a:defRPr sz="1600"/>
+            </a:lvl8pPr>
+            <a:lvl9pPr>
+              <a:defRPr sz="1600"/>
+            </a:lvl9pPr>
+          </a:lstStyle>
           <a:p>
             <a:pPr lvl="0"/>
             <a:r>
-              <a:rPr lang="ja-JP" altLang="en-US"/>
-              <a:t>マスター テキストの書式設定</a:t>
+              <a:rPr lang="en-US" smtClean="0"/>
+              <a:t>Click to edit Master text styles</a:t>
             </a:r>
           </a:p>
           <a:p>
             <a:pPr lvl="1"/>
             <a:r>
-              <a:rPr lang="ja-JP" altLang="en-US"/>
-              <a:t>第 </a:t>
-            </a:r>
-            <a:r>
-              <a:rPr lang="en-US" altLang="ja-JP"/>
-              <a:t>2 </a:t>
-            </a:r>
-            <a:r>
-              <a:rPr lang="ja-JP" altLang="en-US"/>
-              <a:t>レベル</a:t>
+              <a:rPr lang="en-US" smtClean="0"/>
+              <a:t>Second level</a:t>
             </a:r>
           </a:p>
           <a:p>
             <a:pPr lvl="2"/>
             <a:r>
-              <a:rPr lang="ja-JP" altLang="en-US"/>
-              <a:t>第 </a:t>
-            </a:r>
-            <a:r>
-              <a:rPr lang="en-US" altLang="ja-JP"/>
-              <a:t>3 </a:t>
-            </a:r>
-            <a:r>
-              <a:rPr lang="ja-JP" altLang="en-US"/>
-              <a:t>レベル</a:t>
+              <a:rPr lang="en-US" smtClean="0"/>
+              <a:t>Third level</a:t>
             </a:r>
           </a:p>
           <a:p>
             <a:pPr lvl="3"/>
             <a:r>
-              <a:rPr lang="ja-JP" altLang="en-US"/>
-              <a:t>第 </a:t>
-            </a:r>
-            <a:r>
-              <a:rPr lang="en-US" altLang="ja-JP"/>
-              <a:t>4 </a:t>
-            </a:r>
-            <a:r>
-              <a:rPr lang="ja-JP" altLang="en-US"/>
-              <a:t>レベル</a:t>
+              <a:rPr lang="en-US" smtClean="0"/>
+              <a:t>Fourth level</a:t>
             </a:r>
           </a:p>
           <a:p>
             <a:pPr lvl="4"/>
             <a:r>
-              <a:rPr lang="ja-JP" altLang="en-US"/>
-              <a:t>第 </a:t>
-            </a:r>
-            <a:r>
-              <a:rPr lang="en-US" altLang="ja-JP"/>
-              <a:t>5 </a:t>
-            </a:r>
-            <a:r>
-              <a:rPr lang="ja-JP" altLang="en-US"/>
-              <a:t>レベル</a:t>
+              <a:rPr lang="en-US" smtClean="0"/>
+              <a:t>Fifth level</a:t>
             </a:r>
             <a:endParaRPr lang="en-US"/>
           </a:p>
@@ -4054,11 +3957,11 @@
           <a:bodyPr/>
           <a:lstStyle/>
           <a:p>
-            <a:fld id="{FBDB49C8-7237-4C28-89B4-4169268767AD}" type="datetime1">
-              <a:rPr kumimoji="1" lang="ja-JP" altLang="en-US" smtClean="0"/>
-              <a:t>2026/10/6</a:t>
+            <a:fld id="{5BCAD085-E8A6-8845-BD4E-CB4CCA059FC4}" type="datetimeFigureOut">
+              <a:rPr lang="en-US" smtClean="0"/>
+              <a:t>1/27/13</a:t>
             </a:fld>
-            <a:endParaRPr kumimoji="1" lang="ja-JP" altLang="en-US"/>
+            <a:endParaRPr lang="en-US"/>
           </a:p>
         </p:txBody>
       </p:sp>
@@ -4077,7 +3980,7 @@
           <a:bodyPr/>
           <a:lstStyle/>
           <a:p>
-            <a:endParaRPr kumimoji="1" lang="ja-JP" altLang="en-US"/>
+            <a:endParaRPr lang="en-US"/>
           </a:p>
         </p:txBody>
       </p:sp>
@@ -4096,18 +3999,18 @@
           <a:bodyPr/>
           <a:lstStyle/>
           <a:p>
-            <a:fld id="{B261DCAA-373B-405C-9828-CC1EDAA61144}" type="slidenum">
-              <a:rPr kumimoji="1" lang="ja-JP" altLang="en-US" smtClean="0"/>
+            <a:fld id="{C1FF6DA9-008F-8B48-92A6-B652298478BF}" type="slidenum">
+              <a:rPr lang="en-US" smtClean="0"/>
               <a:t>‹#›</a:t>
             </a:fld>
-            <a:endParaRPr kumimoji="1" lang="ja-JP" altLang="en-US"/>
+            <a:endParaRPr lang="en-US"/>
           </a:p>
         </p:txBody>
       </p:sp>
     </p:spTree>
     <p:extLst>
       <p:ext uri="{BB962C8B-B14F-4D97-AF65-F5344CB8AC3E}">
-        <p14:creationId xmlns:p14="http://schemas.microsoft.com/office/powerpoint/2010/main" val="1635170804"/>
+        <p14:creationId xmlns:p14="http://schemas.microsoft.com/office/powerpoint/2010/main" val="990158736"/>
       </p:ext>
     </p:extLst>
   </p:cSld>
@@ -4119,7 +4022,7 @@
 
 <file path=ppt/slideLayouts/slideLayout6.xml><?xml version="1.0" encoding="utf-8"?>
 <p:sldLayout xmlns:a="http://schemas.openxmlformats.org/drawingml/2006/main" xmlns:r="http://schemas.openxmlformats.org/officeDocument/2006/relationships" xmlns:p="http://schemas.openxmlformats.org/presentationml/2006/main" type="titleOnly" preserve="1">
-  <p:cSld name="タイトルのみ">
+  <p:cSld name="Title Only">
     <p:spTree>
       <p:nvGrpSpPr>
         <p:cNvPr id="1" name=""/>
@@ -4150,8 +4053,8 @@
           <a:lstStyle/>
           <a:p>
             <a:r>
-              <a:rPr lang="ja-JP" altLang="en-US"/>
-              <a:t>マスター タイトルの書式設定</a:t>
+              <a:rPr lang="en-US" smtClean="0"/>
+              <a:t>Click to edit Master title style</a:t>
             </a:r>
             <a:endParaRPr lang="en-US"/>
           </a:p>
@@ -4172,11 +4075,11 @@
           <a:bodyPr/>
           <a:lstStyle/>
           <a:p>
-            <a:fld id="{A6537773-5C02-4D8B-AD27-EB0775BD9982}" type="datetime1">
-              <a:rPr kumimoji="1" lang="ja-JP" altLang="en-US" smtClean="0"/>
-              <a:t>2026/10/6</a:t>
+            <a:fld id="{5BCAD085-E8A6-8845-BD4E-CB4CCA059FC4}" type="datetimeFigureOut">
+              <a:rPr lang="en-US" smtClean="0"/>
+              <a:t>1/27/13</a:t>
             </a:fld>
-            <a:endParaRPr kumimoji="1" lang="ja-JP" altLang="en-US"/>
+            <a:endParaRPr lang="en-US"/>
           </a:p>
         </p:txBody>
       </p:sp>
@@ -4195,7 +4098,7 @@
           <a:bodyPr/>
           <a:lstStyle/>
           <a:p>
-            <a:endParaRPr kumimoji="1" lang="ja-JP" altLang="en-US"/>
+            <a:endParaRPr lang="en-US"/>
           </a:p>
         </p:txBody>
       </p:sp>
@@ -4214,18 +4117,18 @@
           <a:bodyPr/>
           <a:lstStyle/>
           <a:p>
-            <a:fld id="{B261DCAA-373B-405C-9828-CC1EDAA61144}" type="slidenum">
-              <a:rPr kumimoji="1" lang="ja-JP" altLang="en-US" smtClean="0"/>
+            <a:fld id="{C1FF6DA9-008F-8B48-92A6-B652298478BF}" type="slidenum">
+              <a:rPr lang="en-US" smtClean="0"/>
               <a:t>‹#›</a:t>
             </a:fld>
-            <a:endParaRPr kumimoji="1" lang="ja-JP" altLang="en-US"/>
+            <a:endParaRPr lang="en-US"/>
           </a:p>
         </p:txBody>
       </p:sp>
     </p:spTree>
     <p:extLst>
       <p:ext uri="{BB962C8B-B14F-4D97-AF65-F5344CB8AC3E}">
-        <p14:creationId xmlns:p14="http://schemas.microsoft.com/office/powerpoint/2010/main" val="3372382838"/>
+        <p14:creationId xmlns:p14="http://schemas.microsoft.com/office/powerpoint/2010/main" val="727027711"/>
       </p:ext>
     </p:extLst>
   </p:cSld>
@@ -4237,7 +4140,7 @@
 
 <file path=ppt/slideLayouts/slideLayout7.xml><?xml version="1.0" encoding="utf-8"?>
 <p:sldLayout xmlns:a="http://schemas.openxmlformats.org/drawingml/2006/main" xmlns:r="http://schemas.openxmlformats.org/officeDocument/2006/relationships" xmlns:p="http://schemas.openxmlformats.org/presentationml/2006/main" type="blank" preserve="1">
-  <p:cSld name="白紙">
+  <p:cSld name="Blank">
     <p:spTree>
       <p:nvGrpSpPr>
         <p:cNvPr id="1" name=""/>
@@ -4267,11 +4170,11 @@
           <a:bodyPr/>
           <a:lstStyle/>
           <a:p>
-            <a:fld id="{C64BD070-DA38-4AF4-BF9F-E9F27788DC0D}" type="datetime1">
-              <a:rPr kumimoji="1" lang="ja-JP" altLang="en-US" smtClean="0"/>
-              <a:t>2026/10/6</a:t>
+            <a:fld id="{5BCAD085-E8A6-8845-BD4E-CB4CCA059FC4}" type="datetimeFigureOut">
+              <a:rPr lang="en-US" smtClean="0"/>
+              <a:t>1/27/13</a:t>
             </a:fld>
-            <a:endParaRPr kumimoji="1" lang="ja-JP" altLang="en-US"/>
+            <a:endParaRPr lang="en-US"/>
           </a:p>
         </p:txBody>
       </p:sp>
@@ -4290,7 +4193,7 @@
           <a:bodyPr/>
           <a:lstStyle/>
           <a:p>
-            <a:endParaRPr kumimoji="1" lang="ja-JP" altLang="en-US"/>
+            <a:endParaRPr lang="en-US"/>
           </a:p>
         </p:txBody>
       </p:sp>
@@ -4309,18 +4212,18 @@
           <a:bodyPr/>
           <a:lstStyle/>
           <a:p>
-            <a:fld id="{B261DCAA-373B-405C-9828-CC1EDAA61144}" type="slidenum">
-              <a:rPr kumimoji="1" lang="ja-JP" altLang="en-US" smtClean="0"/>
+            <a:fld id="{C1FF6DA9-008F-8B48-92A6-B652298478BF}" type="slidenum">
+              <a:rPr lang="en-US" smtClean="0"/>
               <a:t>‹#›</a:t>
             </a:fld>
-            <a:endParaRPr kumimoji="1" lang="ja-JP" altLang="en-US"/>
+            <a:endParaRPr lang="en-US"/>
           </a:p>
         </p:txBody>
       </p:sp>
     </p:spTree>
     <p:extLst>
       <p:ext uri="{BB962C8B-B14F-4D97-AF65-F5344CB8AC3E}">
-        <p14:creationId xmlns:p14="http://schemas.microsoft.com/office/powerpoint/2010/main" val="60813575"/>
+        <p14:creationId xmlns:p14="http://schemas.microsoft.com/office/powerpoint/2010/main" val="1212999818"/>
       </p:ext>
     </p:extLst>
   </p:cSld>
@@ -4332,7 +4235,7 @@
 
 <file path=ppt/slideLayouts/slideLayout8.xml><?xml version="1.0" encoding="utf-8"?>
 <p:sldLayout xmlns:a="http://schemas.openxmlformats.org/drawingml/2006/main" xmlns:r="http://schemas.openxmlformats.org/officeDocument/2006/relationships" xmlns:p="http://schemas.openxmlformats.org/presentationml/2006/main" type="objTx" preserve="1">
-  <p:cSld name="タイトル付きのコンテンツ">
+  <p:cSld name="Content with Caption">
     <p:spTree>
       <p:nvGrpSpPr>
         <p:cNvPr id="1" name=""/>
@@ -4359,21 +4262,21 @@
         </p:nvSpPr>
         <p:spPr>
           <a:xfrm>
-            <a:off x="1007746" y="548640"/>
-            <a:ext cx="4718684" cy="1920240"/>
+            <a:off x="457200" y="273050"/>
+            <a:ext cx="3008313" cy="1162050"/>
           </a:xfrm>
         </p:spPr>
         <p:txBody>
           <a:bodyPr anchor="b"/>
           <a:lstStyle>
-            <a:lvl1pPr>
-              <a:defRPr sz="3840"/>
+            <a:lvl1pPr algn="l">
+              <a:defRPr sz="2000" b="1"/>
             </a:lvl1pPr>
           </a:lstStyle>
           <a:p>
             <a:r>
-              <a:rPr lang="ja-JP" altLang="en-US"/>
-              <a:t>マスター タイトルの書式設定</a:t>
+              <a:rPr lang="en-US" smtClean="0"/>
+              <a:t>Click to edit Master title style</a:t>
             </a:r>
             <a:endParaRPr lang="en-US"/>
           </a:p>
@@ -4391,106 +4294,74 @@
         </p:nvSpPr>
         <p:spPr>
           <a:xfrm>
-            <a:off x="6219826" y="1184911"/>
-            <a:ext cx="7406640" cy="5848350"/>
+            <a:off x="3575050" y="273050"/>
+            <a:ext cx="5111750" cy="5853113"/>
           </a:xfrm>
         </p:spPr>
         <p:txBody>
           <a:bodyPr/>
           <a:lstStyle>
             <a:lvl1pPr>
-              <a:defRPr sz="3840"/>
+              <a:defRPr sz="3200"/>
             </a:lvl1pPr>
             <a:lvl2pPr>
-              <a:defRPr sz="3360"/>
+              <a:defRPr sz="2800"/>
             </a:lvl2pPr>
             <a:lvl3pPr>
-              <a:defRPr sz="2880"/>
+              <a:defRPr sz="2400"/>
             </a:lvl3pPr>
             <a:lvl4pPr>
-              <a:defRPr sz="2400"/>
+              <a:defRPr sz="2000"/>
             </a:lvl4pPr>
             <a:lvl5pPr>
-              <a:defRPr sz="2400"/>
+              <a:defRPr sz="2000"/>
             </a:lvl5pPr>
             <a:lvl6pPr>
-              <a:defRPr sz="2400"/>
+              <a:defRPr sz="2000"/>
             </a:lvl6pPr>
             <a:lvl7pPr>
-              <a:defRPr sz="2400"/>
+              <a:defRPr sz="2000"/>
             </a:lvl7pPr>
             <a:lvl8pPr>
-              <a:defRPr sz="2400"/>
+              <a:defRPr sz="2000"/>
             </a:lvl8pPr>
             <a:lvl9pPr>
-              <a:defRPr sz="2400"/>
+              <a:defRPr sz="2000"/>
             </a:lvl9pPr>
           </a:lstStyle>
           <a:p>
             <a:pPr lvl="0"/>
             <a:r>
-              <a:rPr lang="ja-JP" altLang="en-US"/>
-              <a:t>マスター テキストの書式設定</a:t>
+              <a:rPr lang="en-US" smtClean="0"/>
+              <a:t>Click to edit Master text styles</a:t>
             </a:r>
           </a:p>
           <a:p>
             <a:pPr lvl="1"/>
             <a:r>
-              <a:rPr lang="ja-JP" altLang="en-US"/>
-              <a:t>第 </a:t>
-            </a:r>
-            <a:r>
-              <a:rPr lang="en-US" altLang="ja-JP"/>
-              <a:t>2 </a:t>
-            </a:r>
-            <a:r>
-              <a:rPr lang="ja-JP" altLang="en-US"/>
-              <a:t>レベル</a:t>
+              <a:rPr lang="en-US" smtClean="0"/>
+              <a:t>Second level</a:t>
             </a:r>
           </a:p>
           <a:p>
             <a:pPr lvl="2"/>
             <a:r>
-              <a:rPr lang="ja-JP" altLang="en-US"/>
-              <a:t>第 </a:t>
-            </a:r>
-            <a:r>
-              <a:rPr lang="en-US" altLang="ja-JP"/>
-              <a:t>3 </a:t>
-            </a:r>
-            <a:r>
-              <a:rPr lang="ja-JP" altLang="en-US"/>
-              <a:t>レベル</a:t>
+              <a:rPr lang="en-US" smtClean="0"/>
+              <a:t>Third level</a:t>
             </a:r>
           </a:p>
           <a:p>
             <a:pPr lvl="3"/>
             <a:r>
-              <a:rPr lang="ja-JP" altLang="en-US"/>
-              <a:t>第 </a:t>
-            </a:r>
-            <a:r>
-              <a:rPr lang="en-US" altLang="ja-JP"/>
-              <a:t>4 </a:t>
-            </a:r>
-            <a:r>
-              <a:rPr lang="ja-JP" altLang="en-US"/>
-              <a:t>レベル</a:t>
+              <a:rPr lang="en-US" smtClean="0"/>
+              <a:t>Fourth level</a:t>
             </a:r>
           </a:p>
           <a:p>
             <a:pPr lvl="4"/>
             <a:r>
-              <a:rPr lang="ja-JP" altLang="en-US"/>
-              <a:t>第 </a:t>
-            </a:r>
-            <a:r>
-              <a:rPr lang="en-US" altLang="ja-JP"/>
-              <a:t>5 </a:t>
-            </a:r>
-            <a:r>
-              <a:rPr lang="ja-JP" altLang="en-US"/>
-              <a:t>レベル</a:t>
+              <a:rPr lang="en-US" smtClean="0"/>
+              <a:t>Fifth level</a:t>
             </a:r>
             <a:endParaRPr lang="en-US"/>
           </a:p>
@@ -4508,8 +4379,8 @@
         </p:nvSpPr>
         <p:spPr>
           <a:xfrm>
-            <a:off x="1007746" y="2468880"/>
-            <a:ext cx="4718684" cy="4573906"/>
+            <a:off x="457200" y="1435100"/>
+            <a:ext cx="3008313" cy="4691063"/>
           </a:xfrm>
         </p:spPr>
         <p:txBody>
@@ -4517,46 +4388,46 @@
           <a:lstStyle>
             <a:lvl1pPr marL="0" indent="0">
               <a:buNone/>
-              <a:defRPr sz="1920"/>
+              <a:defRPr sz="1400"/>
             </a:lvl1pPr>
-            <a:lvl2pPr marL="548640" indent="0">
-              <a:buNone/>
-              <a:defRPr sz="1680"/>
-            </a:lvl2pPr>
-            <a:lvl3pPr marL="1097280" indent="0">
-              <a:buNone/>
-              <a:defRPr sz="1440"/>
-            </a:lvl3pPr>
-            <a:lvl4pPr marL="1645920" indent="0">
+            <a:lvl2pPr marL="457200" indent="0">
               <a:buNone/>
               <a:defRPr sz="1200"/>
+            </a:lvl2pPr>
+            <a:lvl3pPr marL="914400" indent="0">
+              <a:buNone/>
+              <a:defRPr sz="1000"/>
+            </a:lvl3pPr>
+            <a:lvl4pPr marL="1371600" indent="0">
+              <a:buNone/>
+              <a:defRPr sz="900"/>
             </a:lvl4pPr>
-            <a:lvl5pPr marL="2194560" indent="0">
+            <a:lvl5pPr marL="1828800" indent="0">
               <a:buNone/>
-              <a:defRPr sz="1200"/>
+              <a:defRPr sz="900"/>
             </a:lvl5pPr>
-            <a:lvl6pPr marL="2743200" indent="0">
+            <a:lvl6pPr marL="2286000" indent="0">
               <a:buNone/>
-              <a:defRPr sz="1200"/>
+              <a:defRPr sz="900"/>
             </a:lvl6pPr>
-            <a:lvl7pPr marL="3291840" indent="0">
+            <a:lvl7pPr marL="2743200" indent="0">
               <a:buNone/>
-              <a:defRPr sz="1200"/>
+              <a:defRPr sz="900"/>
             </a:lvl7pPr>
-            <a:lvl8pPr marL="3840480" indent="0">
+            <a:lvl8pPr marL="3200400" indent="0">
               <a:buNone/>
-              <a:defRPr sz="1200"/>
+              <a:defRPr sz="900"/>
             </a:lvl8pPr>
-            <a:lvl9pPr marL="4389120" indent="0">
+            <a:lvl9pPr marL="3657600" indent="0">
               <a:buNone/>
-              <a:defRPr sz="1200"/>
+              <a:defRPr sz="900"/>
             </a:lvl9pPr>
           </a:lstStyle>
           <a:p>
             <a:pPr lvl="0"/>
             <a:r>
-              <a:rPr lang="ja-JP" altLang="en-US"/>
-              <a:t>マスター テキストの書式設定</a:t>
+              <a:rPr lang="en-US" smtClean="0"/>
+              <a:t>Click to edit Master text styles</a:t>
             </a:r>
           </a:p>
         </p:txBody>
@@ -4576,11 +4447,11 @@
           <a:bodyPr/>
           <a:lstStyle/>
           <a:p>
-            <a:fld id="{02573C21-D990-4F80-A9D0-9B2B0E171534}" type="datetime1">
-              <a:rPr kumimoji="1" lang="ja-JP" altLang="en-US" smtClean="0"/>
-              <a:t>2026/10/6</a:t>
+            <a:fld id="{5BCAD085-E8A6-8845-BD4E-CB4CCA059FC4}" type="datetimeFigureOut">
+              <a:rPr lang="en-US" smtClean="0"/>
+              <a:t>1/27/13</a:t>
             </a:fld>
-            <a:endParaRPr kumimoji="1" lang="ja-JP" altLang="en-US"/>
+            <a:endParaRPr lang="en-US"/>
           </a:p>
         </p:txBody>
       </p:sp>
@@ -4599,7 +4470,7 @@
           <a:bodyPr/>
           <a:lstStyle/>
           <a:p>
-            <a:endParaRPr kumimoji="1" lang="ja-JP" altLang="en-US"/>
+            <a:endParaRPr lang="en-US"/>
           </a:p>
         </p:txBody>
       </p:sp>
@@ -4618,18 +4489,18 @@
           <a:bodyPr/>
           <a:lstStyle/>
           <a:p>
-            <a:fld id="{B261DCAA-373B-405C-9828-CC1EDAA61144}" type="slidenum">
-              <a:rPr kumimoji="1" lang="ja-JP" altLang="en-US" smtClean="0"/>
+            <a:fld id="{C1FF6DA9-008F-8B48-92A6-B652298478BF}" type="slidenum">
+              <a:rPr lang="en-US" smtClean="0"/>
               <a:t>‹#›</a:t>
             </a:fld>
-            <a:endParaRPr kumimoji="1" lang="ja-JP" altLang="en-US"/>
+            <a:endParaRPr lang="en-US"/>
           </a:p>
         </p:txBody>
       </p:sp>
     </p:spTree>
     <p:extLst>
       <p:ext uri="{BB962C8B-B14F-4D97-AF65-F5344CB8AC3E}">
-        <p14:creationId xmlns:p14="http://schemas.microsoft.com/office/powerpoint/2010/main" val="210472799"/>
+        <p14:creationId xmlns:p14="http://schemas.microsoft.com/office/powerpoint/2010/main" val="1840726560"/>
       </p:ext>
     </p:extLst>
   </p:cSld>
@@ -4641,7 +4512,7 @@
 
 <file path=ppt/slideLayouts/slideLayout9.xml><?xml version="1.0" encoding="utf-8"?>
 <p:sldLayout xmlns:a="http://schemas.openxmlformats.org/drawingml/2006/main" xmlns:r="http://schemas.openxmlformats.org/officeDocument/2006/relationships" xmlns:p="http://schemas.openxmlformats.org/presentationml/2006/main" type="picTx" preserve="1">
-  <p:cSld name="タイトル付きの図">
+  <p:cSld name="Picture with Caption">
     <p:spTree>
       <p:nvGrpSpPr>
         <p:cNvPr id="1" name=""/>
@@ -4668,21 +4539,21 @@
         </p:nvSpPr>
         <p:spPr>
           <a:xfrm>
-            <a:off x="1007746" y="548640"/>
-            <a:ext cx="4718684" cy="1920240"/>
+            <a:off x="1792288" y="4800600"/>
+            <a:ext cx="5486400" cy="566738"/>
           </a:xfrm>
         </p:spPr>
         <p:txBody>
           <a:bodyPr anchor="b"/>
           <a:lstStyle>
-            <a:lvl1pPr>
-              <a:defRPr sz="3840"/>
+            <a:lvl1pPr algn="l">
+              <a:defRPr sz="2000" b="1"/>
             </a:lvl1pPr>
           </a:lstStyle>
           <a:p>
             <a:r>
-              <a:rPr lang="ja-JP" altLang="en-US"/>
-              <a:t>マスター タイトルの書式設定</a:t>
+              <a:rPr lang="en-US" smtClean="0"/>
+              <a:t>Click to edit Master title style</a:t>
             </a:r>
             <a:endParaRPr lang="en-US"/>
           </a:p>
@@ -4692,7 +4563,7 @@
         <p:nvSpPr>
           <p:cNvPr id="3" name="Picture Placeholder 2"/>
           <p:cNvSpPr>
-            <a:spLocks noGrp="1" noChangeAspect="1"/>
+            <a:spLocks noGrp="1"/>
           </p:cNvSpPr>
           <p:nvPr>
             <p:ph type="pic" idx="1"/>
@@ -4700,55 +4571,51 @@
         </p:nvSpPr>
         <p:spPr>
           <a:xfrm>
-            <a:off x="6219826" y="1184911"/>
-            <a:ext cx="7406640" cy="5848350"/>
-          </a:xfrm>
-        </p:spPr>
-        <p:txBody>
-          <a:bodyPr anchor="t"/>
+            <a:off x="1792288" y="612775"/>
+            <a:ext cx="5486400" cy="4114800"/>
+          </a:xfrm>
+        </p:spPr>
+        <p:txBody>
+          <a:bodyPr/>
           <a:lstStyle>
             <a:lvl1pPr marL="0" indent="0">
               <a:buNone/>
-              <a:defRPr sz="3840"/>
+              <a:defRPr sz="3200"/>
             </a:lvl1pPr>
-            <a:lvl2pPr marL="548640" indent="0">
+            <a:lvl2pPr marL="457200" indent="0">
               <a:buNone/>
-              <a:defRPr sz="3360"/>
+              <a:defRPr sz="2800"/>
             </a:lvl2pPr>
-            <a:lvl3pPr marL="1097280" indent="0">
-              <a:buNone/>
-              <a:defRPr sz="2880"/>
-            </a:lvl3pPr>
-            <a:lvl4pPr marL="1645920" indent="0">
+            <a:lvl3pPr marL="914400" indent="0">
               <a:buNone/>
               <a:defRPr sz="2400"/>
+            </a:lvl3pPr>
+            <a:lvl4pPr marL="1371600" indent="0">
+              <a:buNone/>
+              <a:defRPr sz="2000"/>
             </a:lvl4pPr>
-            <a:lvl5pPr marL="2194560" indent="0">
+            <a:lvl5pPr marL="1828800" indent="0">
               <a:buNone/>
-              <a:defRPr sz="2400"/>
+              <a:defRPr sz="2000"/>
             </a:lvl5pPr>
-            <a:lvl6pPr marL="2743200" indent="0">
+            <a:lvl6pPr marL="2286000" indent="0">
               <a:buNone/>
-              <a:defRPr sz="2400"/>
+              <a:defRPr sz="2000"/>
             </a:lvl6pPr>
-            <a:lvl7pPr marL="3291840" indent="0">
+            <a:lvl7pPr marL="2743200" indent="0">
               <a:buNone/>
-              <a:defRPr sz="2400"/>
+              <a:defRPr sz="2000"/>
             </a:lvl7pPr>
-            <a:lvl8pPr marL="3840480" indent="0">
+            <a:lvl8pPr marL="3200400" indent="0">
               <a:buNone/>
-              <a:defRPr sz="2400"/>
+              <a:defRPr sz="2000"/>
             </a:lvl8pPr>
-            <a:lvl9pPr marL="4389120" indent="0">
+            <a:lvl9pPr marL="3657600" indent="0">
               <a:buNone/>
-              <a:defRPr sz="2400"/>
+              <a:defRPr sz="2000"/>
             </a:lvl9pPr>
           </a:lstStyle>
           <a:p>
-            <a:r>
-              <a:rPr lang="ja-JP" altLang="en-US"/>
-              <a:t>アイコンをクリックして図を追加</a:t>
-            </a:r>
             <a:endParaRPr lang="en-US"/>
           </a:p>
         </p:txBody>
@@ -4765,8 +4632,8 @@
         </p:nvSpPr>
         <p:spPr>
           <a:xfrm>
-            <a:off x="1007746" y="2468880"/>
-            <a:ext cx="4718684" cy="4573906"/>
+            <a:off x="1792288" y="5367338"/>
+            <a:ext cx="5486400" cy="804862"/>
           </a:xfrm>
         </p:spPr>
         <p:txBody>
@@ -4774,46 +4641,46 @@
           <a:lstStyle>
             <a:lvl1pPr marL="0" indent="0">
               <a:buNone/>
-              <a:defRPr sz="1920"/>
+              <a:defRPr sz="1400"/>
             </a:lvl1pPr>
-            <a:lvl2pPr marL="548640" indent="0">
-              <a:buNone/>
-              <a:defRPr sz="1680"/>
-            </a:lvl2pPr>
-            <a:lvl3pPr marL="1097280" indent="0">
-              <a:buNone/>
-              <a:defRPr sz="1440"/>
-            </a:lvl3pPr>
-            <a:lvl4pPr marL="1645920" indent="0">
+            <a:lvl2pPr marL="457200" indent="0">
               <a:buNone/>
               <a:defRPr sz="1200"/>
+            </a:lvl2pPr>
+            <a:lvl3pPr marL="914400" indent="0">
+              <a:buNone/>
+              <a:defRPr sz="1000"/>
+            </a:lvl3pPr>
+            <a:lvl4pPr marL="1371600" indent="0">
+              <a:buNone/>
+              <a:defRPr sz="900"/>
             </a:lvl4pPr>
-            <a:lvl5pPr marL="2194560" indent="0">
+            <a:lvl5pPr marL="1828800" indent="0">
               <a:buNone/>
-              <a:defRPr sz="1200"/>
+              <a:defRPr sz="900"/>
             </a:lvl5pPr>
-            <a:lvl6pPr marL="2743200" indent="0">
+            <a:lvl6pPr marL="2286000" indent="0">
               <a:buNone/>
-              <a:defRPr sz="1200"/>
+              <a:defRPr sz="900"/>
             </a:lvl6pPr>
-            <a:lvl7pPr marL="3291840" indent="0">
+            <a:lvl7pPr marL="2743200" indent="0">
               <a:buNone/>
-              <a:defRPr sz="1200"/>
+              <a:defRPr sz="900"/>
             </a:lvl7pPr>
-            <a:lvl8pPr marL="3840480" indent="0">
+            <a:lvl8pPr marL="3200400" indent="0">
               <a:buNone/>
-              <a:defRPr sz="1200"/>
+              <a:defRPr sz="900"/>
             </a:lvl8pPr>
-            <a:lvl9pPr marL="4389120" indent="0">
+            <a:lvl9pPr marL="3657600" indent="0">
               <a:buNone/>
-              <a:defRPr sz="1200"/>
+              <a:defRPr sz="900"/>
             </a:lvl9pPr>
           </a:lstStyle>
           <a:p>
             <a:pPr lvl="0"/>
             <a:r>
-              <a:rPr lang="ja-JP" altLang="en-US"/>
-              <a:t>マスター テキストの書式設定</a:t>
+              <a:rPr lang="en-US" smtClean="0"/>
+              <a:t>Click to edit Master text styles</a:t>
             </a:r>
           </a:p>
         </p:txBody>
@@ -4833,11 +4700,11 @@
           <a:bodyPr/>
           <a:lstStyle/>
           <a:p>
-            <a:fld id="{18B25258-D011-4E97-BAAA-DE9DDB375E05}" type="datetime1">
-              <a:rPr kumimoji="1" lang="ja-JP" altLang="en-US" smtClean="0"/>
-              <a:t>2026/10/6</a:t>
+            <a:fld id="{5BCAD085-E8A6-8845-BD4E-CB4CCA059FC4}" type="datetimeFigureOut">
+              <a:rPr lang="en-US" smtClean="0"/>
+              <a:t>1/27/13</a:t>
             </a:fld>
-            <a:endParaRPr kumimoji="1" lang="ja-JP" altLang="en-US"/>
+            <a:endParaRPr lang="en-US"/>
           </a:p>
         </p:txBody>
       </p:sp>
@@ -4856,7 +4723,7 @@
           <a:bodyPr/>
           <a:lstStyle/>
           <a:p>
-            <a:endParaRPr kumimoji="1" lang="ja-JP" altLang="en-US"/>
+            <a:endParaRPr lang="en-US"/>
           </a:p>
         </p:txBody>
       </p:sp>
@@ -4875,18 +4742,18 @@
           <a:bodyPr/>
           <a:lstStyle/>
           <a:p>
-            <a:fld id="{B261DCAA-373B-405C-9828-CC1EDAA61144}" type="slidenum">
-              <a:rPr kumimoji="1" lang="ja-JP" altLang="en-US" smtClean="0"/>
+            <a:fld id="{C1FF6DA9-008F-8B48-92A6-B652298478BF}" type="slidenum">
+              <a:rPr lang="en-US" smtClean="0"/>
               <a:t>‹#›</a:t>
             </a:fld>
-            <a:endParaRPr kumimoji="1" lang="ja-JP" altLang="en-US"/>
+            <a:endParaRPr lang="en-US"/>
           </a:p>
         </p:txBody>
       </p:sp>
     </p:spTree>
     <p:extLst>
       <p:ext uri="{BB962C8B-B14F-4D97-AF65-F5344CB8AC3E}">
-        <p14:creationId xmlns:p14="http://schemas.microsoft.com/office/powerpoint/2010/main" val="208766294"/>
+        <p14:creationId xmlns:p14="http://schemas.microsoft.com/office/powerpoint/2010/main" val="3889236939"/>
       </p:ext>
     </p:extLst>
   </p:cSld>
@@ -4930,8 +4797,8 @@
         </p:nvSpPr>
         <p:spPr>
           <a:xfrm>
-            <a:off x="1005840" y="438150"/>
-            <a:ext cx="12618720" cy="1590676"/>
+            <a:off x="457200" y="274638"/>
+            <a:ext cx="8229600" cy="1143000"/>
           </a:xfrm>
           <a:prstGeom prst="rect">
             <a:avLst/>
@@ -4944,8 +4811,8 @@
           <a:lstStyle/>
           <a:p>
             <a:r>
-              <a:rPr lang="ja-JP" altLang="en-US"/>
-              <a:t>マスター タイトルの書式設定</a:t>
+              <a:rPr lang="en-US" smtClean="0"/>
+              <a:t>Click to edit Master title style</a:t>
             </a:r>
             <a:endParaRPr lang="en-US"/>
           </a:p>
@@ -4963,8 +4830,8 @@
         </p:nvSpPr>
         <p:spPr>
           <a:xfrm>
-            <a:off x="1005840" y="2190750"/>
-            <a:ext cx="12618720" cy="5221606"/>
+            <a:off x="457200" y="1600200"/>
+            <a:ext cx="8229600" cy="4525963"/>
           </a:xfrm>
           <a:prstGeom prst="rect">
             <a:avLst/>
@@ -4978,68 +4845,36 @@
           <a:p>
             <a:pPr lvl="0"/>
             <a:r>
-              <a:rPr lang="ja-JP" altLang="en-US"/>
-              <a:t>マスター テキストの書式設定</a:t>
+              <a:rPr lang="en-US" smtClean="0"/>
+              <a:t>Click to edit Master text styles</a:t>
             </a:r>
           </a:p>
           <a:p>
             <a:pPr lvl="1"/>
             <a:r>
-              <a:rPr lang="ja-JP" altLang="en-US"/>
-              <a:t>第 </a:t>
-            </a:r>
-            <a:r>
-              <a:rPr lang="en-US" altLang="ja-JP"/>
-              <a:t>2 </a:t>
-            </a:r>
-            <a:r>
-              <a:rPr lang="ja-JP" altLang="en-US"/>
-              <a:t>レベル</a:t>
+              <a:rPr lang="en-US" smtClean="0"/>
+              <a:t>Second level</a:t>
             </a:r>
           </a:p>
           <a:p>
             <a:pPr lvl="2"/>
             <a:r>
-              <a:rPr lang="ja-JP" altLang="en-US"/>
-              <a:t>第 </a:t>
-            </a:r>
-            <a:r>
-              <a:rPr lang="en-US" altLang="ja-JP"/>
-              <a:t>3 </a:t>
-            </a:r>
-            <a:r>
-              <a:rPr lang="ja-JP" altLang="en-US"/>
-              <a:t>レベル</a:t>
+              <a:rPr lang="en-US" smtClean="0"/>
+              <a:t>Third level</a:t>
             </a:r>
           </a:p>
           <a:p>
             <a:pPr lvl="3"/>
             <a:r>
-              <a:rPr lang="ja-JP" altLang="en-US"/>
-              <a:t>第 </a:t>
-            </a:r>
-            <a:r>
-              <a:rPr lang="en-US" altLang="ja-JP"/>
-              <a:t>4 </a:t>
-            </a:r>
-            <a:r>
-              <a:rPr lang="ja-JP" altLang="en-US"/>
-              <a:t>レベル</a:t>
+              <a:rPr lang="en-US" smtClean="0"/>
+              <a:t>Fourth level</a:t>
             </a:r>
           </a:p>
           <a:p>
             <a:pPr lvl="4"/>
             <a:r>
-              <a:rPr lang="ja-JP" altLang="en-US"/>
-              <a:t>第 </a:t>
-            </a:r>
-            <a:r>
-              <a:rPr lang="en-US" altLang="ja-JP"/>
-              <a:t>5 </a:t>
-            </a:r>
-            <a:r>
-              <a:rPr lang="ja-JP" altLang="en-US"/>
-              <a:t>レベル</a:t>
+              <a:rPr lang="en-US" smtClean="0"/>
+              <a:t>Fifth level</a:t>
             </a:r>
             <a:endParaRPr lang="en-US"/>
           </a:p>
@@ -5057,8 +4892,8 @@
         </p:nvSpPr>
         <p:spPr>
           <a:xfrm>
-            <a:off x="1005840" y="7627621"/>
-            <a:ext cx="3291840" cy="438150"/>
+            <a:off x="457200" y="6356350"/>
+            <a:ext cx="2133600" cy="365125"/>
           </a:xfrm>
           <a:prstGeom prst="rect">
             <a:avLst/>
@@ -5068,7 +4903,7 @@
           <a:bodyPr vert="horz" lIns="91440" tIns="45720" rIns="91440" bIns="45720" rtlCol="0" anchor="ctr"/>
           <a:lstStyle>
             <a:lvl1pPr algn="l">
-              <a:defRPr sz="1440">
+              <a:defRPr sz="1200">
                 <a:solidFill>
                   <a:schemeClr val="tx1">
                     <a:tint val="75000"/>
@@ -5078,11 +4913,11 @@
             </a:lvl1pPr>
           </a:lstStyle>
           <a:p>
-            <a:fld id="{8166260D-9BC0-4AC3-B908-D667E2AF3F6F}" type="datetime1">
-              <a:rPr kumimoji="1" lang="ja-JP" altLang="en-US" smtClean="0"/>
-              <a:t>2026/10/6</a:t>
+            <a:fld id="{5BCAD085-E8A6-8845-BD4E-CB4CCA059FC4}" type="datetimeFigureOut">
+              <a:rPr lang="en-US" smtClean="0"/>
+              <a:t>1/27/13</a:t>
             </a:fld>
-            <a:endParaRPr kumimoji="1" lang="ja-JP" altLang="en-US"/>
+            <a:endParaRPr lang="en-US"/>
           </a:p>
         </p:txBody>
       </p:sp>
@@ -5098,8 +4933,8 @@
         </p:nvSpPr>
         <p:spPr>
           <a:xfrm>
-            <a:off x="4846320" y="7627621"/>
-            <a:ext cx="4937760" cy="438150"/>
+            <a:off x="3124200" y="6356350"/>
+            <a:ext cx="2895600" cy="365125"/>
           </a:xfrm>
           <a:prstGeom prst="rect">
             <a:avLst/>
@@ -5109,7 +4944,7 @@
           <a:bodyPr vert="horz" lIns="91440" tIns="45720" rIns="91440" bIns="45720" rtlCol="0" anchor="ctr"/>
           <a:lstStyle>
             <a:lvl1pPr algn="ctr">
-              <a:defRPr sz="1440">
+              <a:defRPr sz="1200">
                 <a:solidFill>
                   <a:schemeClr val="tx1">
                     <a:tint val="75000"/>
@@ -5119,7 +4954,7 @@
             </a:lvl1pPr>
           </a:lstStyle>
           <a:p>
-            <a:endParaRPr kumimoji="1" lang="ja-JP" altLang="en-US"/>
+            <a:endParaRPr lang="en-US"/>
           </a:p>
         </p:txBody>
       </p:sp>
@@ -5135,8 +4970,8 @@
         </p:nvSpPr>
         <p:spPr>
           <a:xfrm>
-            <a:off x="10332720" y="7627621"/>
-            <a:ext cx="3291840" cy="438150"/>
+            <a:off x="6553200" y="6356350"/>
+            <a:ext cx="2133600" cy="365125"/>
           </a:xfrm>
           <a:prstGeom prst="rect">
             <a:avLst/>
@@ -5146,7 +4981,7 @@
           <a:bodyPr vert="horz" lIns="91440" tIns="45720" rIns="91440" bIns="45720" rtlCol="0" anchor="ctr"/>
           <a:lstStyle>
             <a:lvl1pPr algn="r">
-              <a:defRPr sz="1440">
+              <a:defRPr sz="1200">
                 <a:solidFill>
                   <a:schemeClr val="tx1">
                     <a:tint val="75000"/>
@@ -5156,47 +4991,43 @@
             </a:lvl1pPr>
           </a:lstStyle>
           <a:p>
-            <a:fld id="{B261DCAA-373B-405C-9828-CC1EDAA61144}" type="slidenum">
-              <a:rPr kumimoji="1" lang="ja-JP" altLang="en-US" smtClean="0"/>
+            <a:fld id="{C1FF6DA9-008F-8B48-92A6-B652298478BF}" type="slidenum">
+              <a:rPr lang="en-US" smtClean="0"/>
               <a:t>‹#›</a:t>
             </a:fld>
-            <a:endParaRPr kumimoji="1" lang="ja-JP" altLang="en-US"/>
+            <a:endParaRPr lang="en-US"/>
           </a:p>
         </p:txBody>
       </p:sp>
     </p:spTree>
     <p:extLst>
       <p:ext uri="{BB962C8B-B14F-4D97-AF65-F5344CB8AC3E}">
-        <p14:creationId xmlns:p14="http://schemas.microsoft.com/office/powerpoint/2010/main" val="565854275"/>
+        <p14:creationId xmlns:p14="http://schemas.microsoft.com/office/powerpoint/2010/main" val="2209977519"/>
       </p:ext>
     </p:extLst>
   </p:cSld>
   <p:clrMap bg1="lt1" tx1="dk1" bg2="lt2" tx2="dk2" accent1="accent1" accent2="accent2" accent3="accent3" accent4="accent4" accent5="accent5" accent6="accent6" hlink="hlink" folHlink="folHlink"/>
   <p:sldLayoutIdLst>
-    <p:sldLayoutId id="2147483661" r:id="rId1"/>
-    <p:sldLayoutId id="2147483662" r:id="rId2"/>
-    <p:sldLayoutId id="2147483663" r:id="rId3"/>
-    <p:sldLayoutId id="2147483664" r:id="rId4"/>
-    <p:sldLayoutId id="2147483665" r:id="rId5"/>
-    <p:sldLayoutId id="2147483666" r:id="rId6"/>
-    <p:sldLayoutId id="2147483667" r:id="rId7"/>
-    <p:sldLayoutId id="2147483668" r:id="rId8"/>
-    <p:sldLayoutId id="2147483669" r:id="rId9"/>
-    <p:sldLayoutId id="2147483670" r:id="rId10"/>
-    <p:sldLayoutId id="2147483671" r:id="rId11"/>
+    <p:sldLayoutId id="2147483649" r:id="rId1"/>
+    <p:sldLayoutId id="2147483650" r:id="rId2"/>
+    <p:sldLayoutId id="2147483651" r:id="rId3"/>
+    <p:sldLayoutId id="2147483652" r:id="rId4"/>
+    <p:sldLayoutId id="2147483653" r:id="rId5"/>
+    <p:sldLayoutId id="2147483654" r:id="rId6"/>
+    <p:sldLayoutId id="2147483655" r:id="rId7"/>
+    <p:sldLayoutId id="2147483656" r:id="rId8"/>
+    <p:sldLayoutId id="2147483657" r:id="rId9"/>
+    <p:sldLayoutId id="2147483658" r:id="rId10"/>
+    <p:sldLayoutId id="2147483659" r:id="rId11"/>
   </p:sldLayoutIdLst>
-  <p:hf hdr="0" ftr="0" dt="0"/>
   <p:txStyles>
     <p:titleStyle>
-      <a:lvl1pPr algn="l" defTabSz="1097280" rtl="0" eaLnBrk="1" latinLnBrk="0" hangingPunct="1">
-        <a:lnSpc>
-          <a:spcPct val="90000"/>
-        </a:lnSpc>
+      <a:lvl1pPr algn="ctr" defTabSz="457200" rtl="0" eaLnBrk="1" latinLnBrk="0" hangingPunct="1">
         <a:spcBef>
           <a:spcPct val="0"/>
         </a:spcBef>
         <a:buNone/>
-        <a:defRPr kumimoji="1" sz="5280" kern="1200">
+        <a:defRPr sz="4400" kern="1200">
           <a:solidFill>
             <a:schemeClr val="tx1"/>
           </a:solidFill>
@@ -5207,16 +5038,13 @@
       </a:lvl1pPr>
     </p:titleStyle>
     <p:bodyStyle>
-      <a:lvl1pPr marL="274320" indent="-274320" algn="l" defTabSz="1097280" rtl="0" eaLnBrk="1" latinLnBrk="0" hangingPunct="1">
-        <a:lnSpc>
-          <a:spcPct val="90000"/>
-        </a:lnSpc>
+      <a:lvl1pPr marL="342900" indent="-342900" algn="l" defTabSz="457200" rtl="0" eaLnBrk="1" latinLnBrk="0" hangingPunct="1">
         <a:spcBef>
-          <a:spcPts val="1200"/>
+          <a:spcPct val="20000"/>
         </a:spcBef>
-        <a:buFont typeface="Arial" panose="020B0604020202020204" pitchFamily="34" charset="0"/>
+        <a:buFont typeface="Arial"/>
         <a:buChar char="•"/>
-        <a:defRPr kumimoji="1" sz="3360" kern="1200">
+        <a:defRPr sz="3200" kern="1200">
           <a:solidFill>
             <a:schemeClr val="tx1"/>
           </a:solidFill>
@@ -5225,16 +5053,13 @@
           <a:cs typeface="+mn-cs"/>
         </a:defRPr>
       </a:lvl1pPr>
-      <a:lvl2pPr marL="822960" indent="-274320" algn="l" defTabSz="1097280" rtl="0" eaLnBrk="1" latinLnBrk="0" hangingPunct="1">
-        <a:lnSpc>
-          <a:spcPct val="90000"/>
-        </a:lnSpc>
+      <a:lvl2pPr marL="742950" indent="-285750" algn="l" defTabSz="457200" rtl="0" eaLnBrk="1" latinLnBrk="0" hangingPunct="1">
         <a:spcBef>
-          <a:spcPts val="600"/>
+          <a:spcPct val="20000"/>
         </a:spcBef>
-        <a:buFont typeface="Arial" panose="020B0604020202020204" pitchFamily="34" charset="0"/>
-        <a:buChar char="•"/>
-        <a:defRPr kumimoji="1" sz="2880" kern="1200">
+        <a:buFont typeface="Arial"/>
+        <a:buChar char="–"/>
+        <a:defRPr sz="2800" kern="1200">
           <a:solidFill>
             <a:schemeClr val="tx1"/>
           </a:solidFill>
@@ -5243,16 +5068,13 @@
           <a:cs typeface="+mn-cs"/>
         </a:defRPr>
       </a:lvl2pPr>
-      <a:lvl3pPr marL="1371600" indent="-274320" algn="l" defTabSz="1097280" rtl="0" eaLnBrk="1" latinLnBrk="0" hangingPunct="1">
-        <a:lnSpc>
-          <a:spcPct val="90000"/>
-        </a:lnSpc>
+      <a:lvl3pPr marL="1143000" indent="-228600" algn="l" defTabSz="457200" rtl="0" eaLnBrk="1" latinLnBrk="0" hangingPunct="1">
         <a:spcBef>
-          <a:spcPts val="600"/>
+          <a:spcPct val="20000"/>
         </a:spcBef>
-        <a:buFont typeface="Arial" panose="020B0604020202020204" pitchFamily="34" charset="0"/>
+        <a:buFont typeface="Arial"/>
         <a:buChar char="•"/>
-        <a:defRPr kumimoji="1" sz="2400" kern="1200">
+        <a:defRPr sz="2400" kern="1200">
           <a:solidFill>
             <a:schemeClr val="tx1"/>
           </a:solidFill>
@@ -5261,16 +5083,13 @@
           <a:cs typeface="+mn-cs"/>
         </a:defRPr>
       </a:lvl3pPr>
-      <a:lvl4pPr marL="1920240" indent="-274320" algn="l" defTabSz="1097280" rtl="0" eaLnBrk="1" latinLnBrk="0" hangingPunct="1">
-        <a:lnSpc>
-          <a:spcPct val="90000"/>
-        </a:lnSpc>
+      <a:lvl4pPr marL="1600200" indent="-228600" algn="l" defTabSz="457200" rtl="0" eaLnBrk="1" latinLnBrk="0" hangingPunct="1">
         <a:spcBef>
-          <a:spcPts val="600"/>
+          <a:spcPct val="20000"/>
         </a:spcBef>
-        <a:buFont typeface="Arial" panose="020B0604020202020204" pitchFamily="34" charset="0"/>
-        <a:buChar char="•"/>
-        <a:defRPr kumimoji="1" sz="2160" kern="1200">
+        <a:buFont typeface="Arial"/>
+        <a:buChar char="–"/>
+        <a:defRPr sz="2000" kern="1200">
           <a:solidFill>
             <a:schemeClr val="tx1"/>
           </a:solidFill>
@@ -5279,16 +5098,13 @@
           <a:cs typeface="+mn-cs"/>
         </a:defRPr>
       </a:lvl4pPr>
-      <a:lvl5pPr marL="2468880" indent="-274320" algn="l" defTabSz="1097280" rtl="0" eaLnBrk="1" latinLnBrk="0" hangingPunct="1">
-        <a:lnSpc>
-          <a:spcPct val="90000"/>
-        </a:lnSpc>
+      <a:lvl5pPr marL="2057400" indent="-228600" algn="l" defTabSz="457200" rtl="0" eaLnBrk="1" latinLnBrk="0" hangingPunct="1">
         <a:spcBef>
-          <a:spcPts val="600"/>
+          <a:spcPct val="20000"/>
         </a:spcBef>
-        <a:buFont typeface="Arial" panose="020B0604020202020204" pitchFamily="34" charset="0"/>
-        <a:buChar char="•"/>
-        <a:defRPr kumimoji="1" sz="2160" kern="1200">
+        <a:buFont typeface="Arial"/>
+        <a:buChar char="»"/>
+        <a:defRPr sz="2000" kern="1200">
           <a:solidFill>
             <a:schemeClr val="tx1"/>
           </a:solidFill>
@@ -5297,16 +5113,13 @@
           <a:cs typeface="+mn-cs"/>
         </a:defRPr>
       </a:lvl5pPr>
-      <a:lvl6pPr marL="3017520" indent="-274320" algn="l" defTabSz="1097280" rtl="0" eaLnBrk="1" latinLnBrk="0" hangingPunct="1">
-        <a:lnSpc>
-          <a:spcPct val="90000"/>
-        </a:lnSpc>
+      <a:lvl6pPr marL="2514600" indent="-228600" algn="l" defTabSz="457200" rtl="0" eaLnBrk="1" latinLnBrk="0" hangingPunct="1">
         <a:spcBef>
-          <a:spcPts val="600"/>
+          <a:spcPct val="20000"/>
         </a:spcBef>
-        <a:buFont typeface="Arial" panose="020B0604020202020204" pitchFamily="34" charset="0"/>
+        <a:buFont typeface="Arial"/>
         <a:buChar char="•"/>
-        <a:defRPr kumimoji="1" sz="2160" kern="1200">
+        <a:defRPr sz="2000" kern="1200">
           <a:solidFill>
             <a:schemeClr val="tx1"/>
           </a:solidFill>
@@ -5315,16 +5128,13 @@
           <a:cs typeface="+mn-cs"/>
         </a:defRPr>
       </a:lvl6pPr>
-      <a:lvl7pPr marL="3566160" indent="-274320" algn="l" defTabSz="1097280" rtl="0" eaLnBrk="1" latinLnBrk="0" hangingPunct="1">
-        <a:lnSpc>
-          <a:spcPct val="90000"/>
-        </a:lnSpc>
+      <a:lvl7pPr marL="2971800" indent="-228600" algn="l" defTabSz="457200" rtl="0" eaLnBrk="1" latinLnBrk="0" hangingPunct="1">
         <a:spcBef>
-          <a:spcPts val="600"/>
+          <a:spcPct val="20000"/>
         </a:spcBef>
-        <a:buFont typeface="Arial" panose="020B0604020202020204" pitchFamily="34" charset="0"/>
+        <a:buFont typeface="Arial"/>
         <a:buChar char="•"/>
-        <a:defRPr kumimoji="1" sz="2160" kern="1200">
+        <a:defRPr sz="2000" kern="1200">
           <a:solidFill>
             <a:schemeClr val="tx1"/>
           </a:solidFill>
@@ -5333,16 +5143,13 @@
           <a:cs typeface="+mn-cs"/>
         </a:defRPr>
       </a:lvl7pPr>
-      <a:lvl8pPr marL="4114800" indent="-274320" algn="l" defTabSz="1097280" rtl="0" eaLnBrk="1" latinLnBrk="0" hangingPunct="1">
-        <a:lnSpc>
-          <a:spcPct val="90000"/>
-        </a:lnSpc>
+      <a:lvl8pPr marL="3429000" indent="-228600" algn="l" defTabSz="457200" rtl="0" eaLnBrk="1" latinLnBrk="0" hangingPunct="1">
         <a:spcBef>
-          <a:spcPts val="600"/>
+          <a:spcPct val="20000"/>
         </a:spcBef>
-        <a:buFont typeface="Arial" panose="020B0604020202020204" pitchFamily="34" charset="0"/>
+        <a:buFont typeface="Arial"/>
         <a:buChar char="•"/>
-        <a:defRPr kumimoji="1" sz="2160" kern="1200">
+        <a:defRPr sz="2000" kern="1200">
           <a:solidFill>
             <a:schemeClr val="tx1"/>
           </a:solidFill>
@@ -5351,16 +5158,13 @@
           <a:cs typeface="+mn-cs"/>
         </a:defRPr>
       </a:lvl8pPr>
-      <a:lvl9pPr marL="4663440" indent="-274320" algn="l" defTabSz="1097280" rtl="0" eaLnBrk="1" latinLnBrk="0" hangingPunct="1">
-        <a:lnSpc>
-          <a:spcPct val="90000"/>
-        </a:lnSpc>
+      <a:lvl9pPr marL="3886200" indent="-228600" algn="l" defTabSz="457200" rtl="0" eaLnBrk="1" latinLnBrk="0" hangingPunct="1">
         <a:spcBef>
-          <a:spcPts val="600"/>
+          <a:spcPct val="20000"/>
         </a:spcBef>
-        <a:buFont typeface="Arial" panose="020B0604020202020204" pitchFamily="34" charset="0"/>
+        <a:buFont typeface="Arial"/>
         <a:buChar char="•"/>
-        <a:defRPr kumimoji="1" sz="2160" kern="1200">
+        <a:defRPr sz="2000" kern="1200">
           <a:solidFill>
             <a:schemeClr val="tx1"/>
           </a:solidFill>
@@ -5374,8 +5178,8 @@
       <a:defPPr>
         <a:defRPr lang="en-US"/>
       </a:defPPr>
-      <a:lvl1pPr marL="0" algn="l" defTabSz="1097280" rtl="0" eaLnBrk="1" latinLnBrk="0" hangingPunct="1">
-        <a:defRPr kumimoji="1" sz="2160" kern="1200">
+      <a:lvl1pPr marL="0" algn="l" defTabSz="457200" rtl="0" eaLnBrk="1" latinLnBrk="0" hangingPunct="1">
+        <a:defRPr sz="1800" kern="1200">
           <a:solidFill>
             <a:schemeClr val="tx1"/>
           </a:solidFill>
@@ -5384,8 +5188,8 @@
           <a:cs typeface="+mn-cs"/>
         </a:defRPr>
       </a:lvl1pPr>
-      <a:lvl2pPr marL="548640" algn="l" defTabSz="1097280" rtl="0" eaLnBrk="1" latinLnBrk="0" hangingPunct="1">
-        <a:defRPr kumimoji="1" sz="2160" kern="1200">
+      <a:lvl2pPr marL="457200" algn="l" defTabSz="457200" rtl="0" eaLnBrk="1" latinLnBrk="0" hangingPunct="1">
+        <a:defRPr sz="1800" kern="1200">
           <a:solidFill>
             <a:schemeClr val="tx1"/>
           </a:solidFill>
@@ -5394,8 +5198,8 @@
           <a:cs typeface="+mn-cs"/>
         </a:defRPr>
       </a:lvl2pPr>
-      <a:lvl3pPr marL="1097280" algn="l" defTabSz="1097280" rtl="0" eaLnBrk="1" latinLnBrk="0" hangingPunct="1">
-        <a:defRPr kumimoji="1" sz="2160" kern="1200">
+      <a:lvl3pPr marL="914400" algn="l" defTabSz="457200" rtl="0" eaLnBrk="1" latinLnBrk="0" hangingPunct="1">
+        <a:defRPr sz="1800" kern="1200">
           <a:solidFill>
             <a:schemeClr val="tx1"/>
           </a:solidFill>
@@ -5404,8 +5208,8 @@
           <a:cs typeface="+mn-cs"/>
         </a:defRPr>
       </a:lvl3pPr>
-      <a:lvl4pPr marL="1645920" algn="l" defTabSz="1097280" rtl="0" eaLnBrk="1" latinLnBrk="0" hangingPunct="1">
-        <a:defRPr kumimoji="1" sz="2160" kern="1200">
+      <a:lvl4pPr marL="1371600" algn="l" defTabSz="457200" rtl="0" eaLnBrk="1" latinLnBrk="0" hangingPunct="1">
+        <a:defRPr sz="1800" kern="1200">
           <a:solidFill>
             <a:schemeClr val="tx1"/>
           </a:solidFill>
@@ -5414,8 +5218,8 @@
           <a:cs typeface="+mn-cs"/>
         </a:defRPr>
       </a:lvl4pPr>
-      <a:lvl5pPr marL="2194560" algn="l" defTabSz="1097280" rtl="0" eaLnBrk="1" latinLnBrk="0" hangingPunct="1">
-        <a:defRPr kumimoji="1" sz="2160" kern="1200">
+      <a:lvl5pPr marL="1828800" algn="l" defTabSz="457200" rtl="0" eaLnBrk="1" latinLnBrk="0" hangingPunct="1">
+        <a:defRPr sz="1800" kern="1200">
           <a:solidFill>
             <a:schemeClr val="tx1"/>
           </a:solidFill>
@@ -5424,8 +5228,8 @@
           <a:cs typeface="+mn-cs"/>
         </a:defRPr>
       </a:lvl5pPr>
-      <a:lvl6pPr marL="2743200" algn="l" defTabSz="1097280" rtl="0" eaLnBrk="1" latinLnBrk="0" hangingPunct="1">
-        <a:defRPr kumimoji="1" sz="2160" kern="1200">
+      <a:lvl6pPr marL="2286000" algn="l" defTabSz="457200" rtl="0" eaLnBrk="1" latinLnBrk="0" hangingPunct="1">
+        <a:defRPr sz="1800" kern="1200">
           <a:solidFill>
             <a:schemeClr val="tx1"/>
           </a:solidFill>
@@ -5434,8 +5238,8 @@
           <a:cs typeface="+mn-cs"/>
         </a:defRPr>
       </a:lvl6pPr>
-      <a:lvl7pPr marL="3291840" algn="l" defTabSz="1097280" rtl="0" eaLnBrk="1" latinLnBrk="0" hangingPunct="1">
-        <a:defRPr kumimoji="1" sz="2160" kern="1200">
+      <a:lvl7pPr marL="2743200" algn="l" defTabSz="457200" rtl="0" eaLnBrk="1" latinLnBrk="0" hangingPunct="1">
+        <a:defRPr sz="1800" kern="1200">
           <a:solidFill>
             <a:schemeClr val="tx1"/>
           </a:solidFill>
@@ -5444,8 +5248,8 @@
           <a:cs typeface="+mn-cs"/>
         </a:defRPr>
       </a:lvl7pPr>
-      <a:lvl8pPr marL="3840480" algn="l" defTabSz="1097280" rtl="0" eaLnBrk="1" latinLnBrk="0" hangingPunct="1">
-        <a:defRPr kumimoji="1" sz="2160" kern="1200">
+      <a:lvl8pPr marL="3200400" algn="l" defTabSz="457200" rtl="0" eaLnBrk="1" latinLnBrk="0" hangingPunct="1">
+        <a:defRPr sz="1800" kern="1200">
           <a:solidFill>
             <a:schemeClr val="tx1"/>
           </a:solidFill>
@@ -5454,8 +5258,8 @@
           <a:cs typeface="+mn-cs"/>
         </a:defRPr>
       </a:lvl8pPr>
-      <a:lvl9pPr marL="4389120" algn="l" defTabSz="1097280" rtl="0" eaLnBrk="1" latinLnBrk="0" hangingPunct="1">
-        <a:defRPr kumimoji="1" sz="2160" kern="1200">
+      <a:lvl9pPr marL="3657600" algn="l" defTabSz="457200" rtl="0" eaLnBrk="1" latinLnBrk="0" hangingPunct="1">
+        <a:defRPr sz="1800" kern="1200">
           <a:solidFill>
             <a:schemeClr val="tx1"/>
           </a:solidFill>
@@ -26138,9 +25942,9 @@
 </file>
 
 <file path=ppt/theme/theme1.xml><?xml version="1.0" encoding="utf-8"?>
-<a:theme xmlns:a="http://schemas.openxmlformats.org/drawingml/2006/main" name="Office テーマ">
+<a:theme xmlns:a="http://schemas.openxmlformats.org/drawingml/2006/main" name="Office Theme">
   <a:themeElements>
-    <a:clrScheme name="Office テーマ">
+    <a:clrScheme name="Office">
       <a:dk1>
         <a:sysClr val="windowText" lastClr="000000"/>
       </a:dk1>
@@ -26148,44 +25952,44 @@
         <a:sysClr val="window" lastClr="FFFFFF"/>
       </a:lt1>
       <a:dk2>
-        <a:srgbClr val="44546A"/>
+        <a:srgbClr val="1F497D"/>
       </a:dk2>
       <a:lt2>
-        <a:srgbClr val="E7E6E6"/>
+        <a:srgbClr val="EEECE1"/>
       </a:lt2>
       <a:accent1>
-        <a:srgbClr val="4472C4"/>
+        <a:srgbClr val="4F81BD"/>
       </a:accent1>
       <a:accent2>
-        <a:srgbClr val="ED7D31"/>
+        <a:srgbClr val="C0504D"/>
       </a:accent2>
       <a:accent3>
-        <a:srgbClr val="A5A5A5"/>
+        <a:srgbClr val="9BBB59"/>
       </a:accent3>
       <a:accent4>
-        <a:srgbClr val="FFC000"/>
+        <a:srgbClr val="8064A2"/>
       </a:accent4>
       <a:accent5>
-        <a:srgbClr val="5B9BD5"/>
+        <a:srgbClr val="4BACC6"/>
       </a:accent5>
       <a:accent6>
-        <a:srgbClr val="70AD47"/>
+        <a:srgbClr val="F79646"/>
       </a:accent6>
       <a:hlink>
-        <a:srgbClr val="0563C1"/>
+        <a:srgbClr val="0000FF"/>
       </a:hlink>
       <a:folHlink>
-        <a:srgbClr val="954F72"/>
+        <a:srgbClr val="800080"/>
       </a:folHlink>
     </a:clrScheme>
     <a:fontScheme name="Office">
       <a:majorFont>
-        <a:latin typeface="Yu Gothic UI" panose="020F0302020204030204"/>
+        <a:latin typeface="Calibri"/>
         <a:ea typeface=""/>
         <a:cs typeface=""/>
-        <a:font script="Jpan" typeface="Yu Gothic UI"/>
+        <a:font script="Jpan" typeface="ＭＳ Ｐゴシック"/>
         <a:font script="Hang" typeface="맑은 고딕"/>
-        <a:font script="Hans" typeface="等线 Light"/>
+        <a:font script="Hans" typeface="宋体"/>
         <a:font script="Hant" typeface="新細明體"/>
         <a:font script="Arab" typeface="Times New Roman"/>
         <a:font script="Hebr" typeface="Times New Roman"/>
@@ -26213,31 +26017,14 @@
         <a:font script="Viet" typeface="Times New Roman"/>
         <a:font script="Uigh" typeface="Microsoft Uighur"/>
         <a:font script="Geor" typeface="Sylfaen"/>
-        <a:font script="Armn" typeface="Arial"/>
-        <a:font script="Bugi" typeface="Leelawadee UI"/>
-        <a:font script="Bopo" typeface="Microsoft JhengHei"/>
-        <a:font script="Java" typeface="Javanese Text"/>
-        <a:font script="Lisu" typeface="Segoe UI"/>
-        <a:font script="Mymr" typeface="Myanmar Text"/>
-        <a:font script="Nkoo" typeface="Ebrima"/>
-        <a:font script="Olck" typeface="Nirmala UI"/>
-        <a:font script="Osma" typeface="Ebrima"/>
-        <a:font script="Phag" typeface="Phagspa"/>
-        <a:font script="Syrn" typeface="Estrangelo Edessa"/>
-        <a:font script="Syrj" typeface="Estrangelo Edessa"/>
-        <a:font script="Syre" typeface="Estrangelo Edessa"/>
-        <a:font script="Sora" typeface="Nirmala UI"/>
-        <a:font script="Tale" typeface="Microsoft Tai Le"/>
-        <a:font script="Talu" typeface="Microsoft New Tai Lue"/>
-        <a:font script="Tfng" typeface="Ebrima"/>
       </a:majorFont>
       <a:minorFont>
-        <a:latin typeface="Yu Gothic UI" panose="020F0502020204030204"/>
+        <a:latin typeface="Calibri"/>
         <a:ea typeface=""/>
         <a:cs typeface=""/>
-        <a:font script="Jpan" typeface="Yu Gothic UI"/>
+        <a:font script="Jpan" typeface="ＭＳ Ｐゴシック"/>
         <a:font script="Hang" typeface="맑은 고딕"/>
-        <a:font script="Hans" typeface="等线"/>
+        <a:font script="Hans" typeface="宋体"/>
         <a:font script="Hant" typeface="新細明體"/>
         <a:font script="Arab" typeface="Arial"/>
         <a:font script="Hebr" typeface="Arial"/>
@@ -26265,26 +26052,9 @@
         <a:font script="Viet" typeface="Arial"/>
         <a:font script="Uigh" typeface="Microsoft Uighur"/>
         <a:font script="Geor" typeface="Sylfaen"/>
-        <a:font script="Armn" typeface="Arial"/>
-        <a:font script="Bugi" typeface="Leelawadee UI"/>
-        <a:font script="Bopo" typeface="Microsoft JhengHei"/>
-        <a:font script="Java" typeface="Javanese Text"/>
-        <a:font script="Lisu" typeface="Segoe UI"/>
-        <a:font script="Mymr" typeface="Myanmar Text"/>
-        <a:font script="Nkoo" typeface="Ebrima"/>
-        <a:font script="Olck" typeface="Nirmala UI"/>
-        <a:font script="Osma" typeface="Ebrima"/>
-        <a:font script="Phag" typeface="Phagspa"/>
-        <a:font script="Syrn" typeface="Estrangelo Edessa"/>
-        <a:font script="Syrj" typeface="Estrangelo Edessa"/>
-        <a:font script="Syre" typeface="Estrangelo Edessa"/>
-        <a:font script="Sora" typeface="Nirmala UI"/>
-        <a:font script="Tale" typeface="Microsoft Tai Le"/>
-        <a:font script="Talu" typeface="Microsoft New Tai Lue"/>
-        <a:font script="Tfng" typeface="Ebrima"/>
       </a:minorFont>
     </a:fontScheme>
-    <a:fmtScheme name="Office テーマ">
+    <a:fmtScheme name="Office">
       <a:fillStyleLst>
         <a:solidFill>
           <a:schemeClr val="phClr"/>
@@ -26293,76 +26063,66 @@
           <a:gsLst>
             <a:gs pos="0">
               <a:schemeClr val="phClr">
-                <a:lumMod val="110000"/>
-                <a:satMod val="105000"/>
-                <a:tint val="67000"/>
+                <a:tint val="50000"/>
+                <a:satMod val="300000"/>
               </a:schemeClr>
             </a:gs>
-            <a:gs pos="50000">
+            <a:gs pos="35000">
               <a:schemeClr val="phClr">
-                <a:lumMod val="105000"/>
-                <a:satMod val="103000"/>
-                <a:tint val="73000"/>
+                <a:tint val="37000"/>
+                <a:satMod val="300000"/>
               </a:schemeClr>
             </a:gs>
             <a:gs pos="100000">
               <a:schemeClr val="phClr">
-                <a:lumMod val="105000"/>
-                <a:satMod val="109000"/>
-                <a:tint val="81000"/>
+                <a:tint val="15000"/>
+                <a:satMod val="350000"/>
               </a:schemeClr>
             </a:gs>
           </a:gsLst>
-          <a:lin ang="5400000" scaled="0"/>
+          <a:lin ang="16200000" scaled="1"/>
         </a:gradFill>
         <a:gradFill rotWithShape="1">
           <a:gsLst>
             <a:gs pos="0">
               <a:schemeClr val="phClr">
-                <a:satMod val="103000"/>
-                <a:lumMod val="102000"/>
-                <a:tint val="94000"/>
-              </a:schemeClr>
-            </a:gs>
-            <a:gs pos="50000">
-              <a:schemeClr val="phClr">
-                <a:satMod val="110000"/>
-                <a:lumMod val="100000"/>
+                <a:tint val="100000"/>
                 <a:shade val="100000"/>
+                <a:satMod val="130000"/>
               </a:schemeClr>
             </a:gs>
             <a:gs pos="100000">
               <a:schemeClr val="phClr">
-                <a:lumMod val="99000"/>
-                <a:satMod val="120000"/>
-                <a:shade val="78000"/>
+                <a:tint val="50000"/>
+                <a:shade val="100000"/>
+                <a:satMod val="350000"/>
               </a:schemeClr>
             </a:gs>
           </a:gsLst>
-          <a:lin ang="5400000" scaled="0"/>
+          <a:lin ang="16200000" scaled="0"/>
         </a:gradFill>
       </a:fillStyleLst>
       <a:lnStyleLst>
-        <a:ln w="6350" cap="flat" cmpd="sng" algn="ctr">
+        <a:ln w="9525" cap="flat" cmpd="sng" algn="ctr">
+          <a:solidFill>
+            <a:schemeClr val="phClr">
+              <a:shade val="95000"/>
+              <a:satMod val="105000"/>
+            </a:schemeClr>
+          </a:solidFill>
+          <a:prstDash val="solid"/>
+        </a:ln>
+        <a:ln w="25400" cap="flat" cmpd="sng" algn="ctr">
           <a:solidFill>
             <a:schemeClr val="phClr"/>
           </a:solidFill>
           <a:prstDash val="solid"/>
-          <a:miter lim="800000"/>
         </a:ln>
-        <a:ln w="12700" cap="flat" cmpd="sng" algn="ctr">
+        <a:ln w="38100" cap="flat" cmpd="sng" algn="ctr">
           <a:solidFill>
             <a:schemeClr val="phClr"/>
           </a:solidFill>
           <a:prstDash val="solid"/>
-          <a:miter lim="800000"/>
-        </a:ln>
-        <a:ln w="19050" cap="flat" cmpd="sng" algn="ctr">
-          <a:solidFill>
-            <a:schemeClr val="phClr"/>
-          </a:solidFill>
-          <a:prstDash val="solid"/>
-          <a:miter lim="800000"/>
         </a:ln>
       </a:lnStyleLst>
       <a:effectStyleLst>
@@ -26373,67 +26133,107 @@
           <a:effectLst/>
         </a:effectStyle>
         <a:effectStyle>
-          <a:effectLst>
-            <a:outerShdw blurRad="57150" dist="19050" dir="5400000" algn="ctr" rotWithShape="0">
-              <a:srgbClr val="000000">
-                <a:alpha val="63000"/>
-              </a:srgbClr>
-            </a:outerShdw>
-          </a:effectLst>
+          <a:effectLst/>
         </a:effectStyle>
       </a:effectStyleLst>
       <a:bgFillStyleLst>
         <a:solidFill>
           <a:schemeClr val="phClr"/>
         </a:solidFill>
-        <a:solidFill>
-          <a:schemeClr val="phClr">
-            <a:tint val="95000"/>
-            <a:satMod val="170000"/>
-          </a:schemeClr>
-        </a:solidFill>
         <a:gradFill rotWithShape="1">
           <a:gsLst>
             <a:gs pos="0">
               <a:schemeClr val="phClr">
-                <a:tint val="93000"/>
-                <a:satMod val="150000"/>
-                <a:shade val="98000"/>
-                <a:lumMod val="102000"/>
+                <a:tint val="40000"/>
+                <a:satMod val="350000"/>
               </a:schemeClr>
             </a:gs>
-            <a:gs pos="50000">
+            <a:gs pos="40000">
               <a:schemeClr val="phClr">
-                <a:tint val="98000"/>
-                <a:satMod val="130000"/>
-                <a:shade val="90000"/>
-                <a:lumMod val="103000"/>
+                <a:tint val="45000"/>
+                <a:shade val="99000"/>
+                <a:satMod val="350000"/>
               </a:schemeClr>
             </a:gs>
             <a:gs pos="100000">
               <a:schemeClr val="phClr">
-                <a:shade val="63000"/>
-                <a:satMod val="120000"/>
+                <a:shade val="20000"/>
+                <a:satMod val="255000"/>
               </a:schemeClr>
             </a:gs>
           </a:gsLst>
-          <a:lin ang="5400000" scaled="0"/>
+          <a:path path="circle">
+            <a:fillToRect l="50000" t="-80000" r="50000" b="180000"/>
+          </a:path>
+        </a:gradFill>
+        <a:gradFill rotWithShape="1">
+          <a:gsLst>
+            <a:gs pos="0">
+              <a:schemeClr val="phClr">
+                <a:tint val="80000"/>
+                <a:satMod val="300000"/>
+              </a:schemeClr>
+            </a:gs>
+            <a:gs pos="100000">
+              <a:schemeClr val="phClr">
+                <a:shade val="30000"/>
+                <a:satMod val="200000"/>
+              </a:schemeClr>
+            </a:gs>
+          </a:gsLst>
+          <a:path path="circle">
+            <a:fillToRect l="50000" t="50000" r="50000" b="50000"/>
+          </a:path>
         </a:gradFill>
       </a:bgFillStyleLst>
     </a:fmtScheme>
   </a:themeElements>
-  <a:objectDefaults/>
+  <a:objectDefaults>
+    <a:spDef>
+      <a:spPr/>
+      <a:bodyPr/>
+      <a:lstStyle/>
+      <a:style>
+        <a:lnRef idx="1">
+          <a:schemeClr val="accent1"/>
+        </a:lnRef>
+        <a:fillRef idx="3">
+          <a:schemeClr val="accent1"/>
+        </a:fillRef>
+        <a:effectRef idx="2">
+          <a:schemeClr val="accent1"/>
+        </a:effectRef>
+        <a:fontRef idx="minor">
+          <a:schemeClr val="lt1"/>
+        </a:fontRef>
+      </a:style>
+    </a:spDef>
+    <a:lnDef>
+      <a:spPr/>
+      <a:bodyPr/>
+      <a:lstStyle/>
+      <a:style>
+        <a:lnRef idx="2">
+          <a:schemeClr val="accent1"/>
+        </a:lnRef>
+        <a:fillRef idx="0">
+          <a:schemeClr val="accent1"/>
+        </a:fillRef>
+        <a:effectRef idx="1">
+          <a:schemeClr val="accent1"/>
+        </a:effectRef>
+        <a:fontRef idx="minor">
+          <a:schemeClr val="tx1"/>
+        </a:fontRef>
+      </a:style>
+    </a:lnDef>
+  </a:objectDefaults>
   <a:extraClrSchemeLst/>
-  <a:extLst>
-    <a:ext uri="{05A4C25C-085E-4340-85A3-A5531E510DB2}">
-      <thm15:themeFamily xmlns:thm15="http://schemas.microsoft.com/office/thememl/2012/main" name="Office 2013 - 2022 Theme" id="{62F939B6-93AF-4DB8-9C6B-D6C7DFDC589F}" vid="{4A3C46E8-61CC-4603-A589-7422A47A8E4A}"/>
-    </a:ext>
-  </a:extLst>
 </a:theme>
 </file>
 
 <file path=ppt/theme/theme2.xml><?xml version="1.0" encoding="utf-8"?>
-<a:theme xmlns:a="http://schemas.openxmlformats.org/drawingml/2006/main" name="Office テーマ">
+<a:theme xmlns:a="http://schemas.openxmlformats.org/drawingml/2006/main" name="Office Theme">
   <a:themeElements>
     <a:clrScheme name="Office">
       <a:dk1>
@@ -26443,44 +26243,44 @@
         <a:sysClr val="window" lastClr="FFFFFF"/>
       </a:lt1>
       <a:dk2>
-        <a:srgbClr val="44546A"/>
+        <a:srgbClr val="1F497D"/>
       </a:dk2>
       <a:lt2>
-        <a:srgbClr val="E7E6E6"/>
+        <a:srgbClr val="EEECE1"/>
       </a:lt2>
       <a:accent1>
-        <a:srgbClr val="4472C4"/>
+        <a:srgbClr val="4F81BD"/>
       </a:accent1>
       <a:accent2>
-        <a:srgbClr val="ED7D31"/>
+        <a:srgbClr val="C0504D"/>
       </a:accent2>
       <a:accent3>
-        <a:srgbClr val="A5A5A5"/>
+        <a:srgbClr val="9BBB59"/>
       </a:accent3>
       <a:accent4>
-        <a:srgbClr val="FFC000"/>
+        <a:srgbClr val="8064A2"/>
       </a:accent4>
       <a:accent5>
-        <a:srgbClr val="5B9BD5"/>
+        <a:srgbClr val="4BACC6"/>
       </a:accent5>
       <a:accent6>
-        <a:srgbClr val="70AD47"/>
+        <a:srgbClr val="F79646"/>
       </a:accent6>
       <a:hlink>
-        <a:srgbClr val="0563C1"/>
+        <a:srgbClr val="0000FF"/>
       </a:hlink>
       <a:folHlink>
-        <a:srgbClr val="954F72"/>
+        <a:srgbClr val="800080"/>
       </a:folHlink>
     </a:clrScheme>
     <a:fontScheme name="Office">
       <a:majorFont>
-        <a:latin typeface="游ゴシック Light" panose="020F0302020204030204"/>
+        <a:latin typeface="Calibri"/>
         <a:ea typeface=""/>
         <a:cs typeface=""/>
-        <a:font script="Jpan" typeface="游ゴシック Light"/>
+        <a:font script="Jpan" typeface="ＭＳ Ｐゴシック"/>
         <a:font script="Hang" typeface="맑은 고딕"/>
-        <a:font script="Hans" typeface="等线 Light"/>
+        <a:font script="Hans" typeface="宋体"/>
         <a:font script="Hant" typeface="新細明體"/>
         <a:font script="Arab" typeface="Times New Roman"/>
         <a:font script="Hebr" typeface="Times New Roman"/>
@@ -26508,31 +26308,14 @@
         <a:font script="Viet" typeface="Times New Roman"/>
         <a:font script="Uigh" typeface="Microsoft Uighur"/>
         <a:font script="Geor" typeface="Sylfaen"/>
-        <a:font script="Armn" typeface="Arial"/>
-        <a:font script="Bugi" typeface="Leelawadee UI"/>
-        <a:font script="Bopo" typeface="Microsoft JhengHei"/>
-        <a:font script="Java" typeface="Javanese Text"/>
-        <a:font script="Lisu" typeface="Segoe UI"/>
-        <a:font script="Mymr" typeface="Myanmar Text"/>
-        <a:font script="Nkoo" typeface="Ebrima"/>
-        <a:font script="Olck" typeface="Nirmala UI"/>
-        <a:font script="Osma" typeface="Ebrima"/>
-        <a:font script="Phag" typeface="Phagspa"/>
-        <a:font script="Syrn" typeface="Estrangelo Edessa"/>
-        <a:font script="Syrj" typeface="Estrangelo Edessa"/>
-        <a:font script="Syre" typeface="Estrangelo Edessa"/>
-        <a:font script="Sora" typeface="Nirmala UI"/>
-        <a:font script="Tale" typeface="Microsoft Tai Le"/>
-        <a:font script="Talu" typeface="Microsoft New Tai Lue"/>
-        <a:font script="Tfng" typeface="Ebrima"/>
       </a:majorFont>
       <a:minorFont>
-        <a:latin typeface="游ゴシック" panose="020F0502020204030204"/>
+        <a:latin typeface="Calibri"/>
         <a:ea typeface=""/>
         <a:cs typeface=""/>
-        <a:font script="Jpan" typeface="游ゴシック"/>
+        <a:font script="Jpan" typeface="ＭＳ Ｐゴシック"/>
         <a:font script="Hang" typeface="맑은 고딕"/>
-        <a:font script="Hans" typeface="等线"/>
+        <a:font script="Hans" typeface="宋体"/>
         <a:font script="Hant" typeface="新細明體"/>
         <a:font script="Arab" typeface="Arial"/>
         <a:font script="Hebr" typeface="Arial"/>
@@ -26560,23 +26343,6 @@
         <a:font script="Viet" typeface="Arial"/>
         <a:font script="Uigh" typeface="Microsoft Uighur"/>
         <a:font script="Geor" typeface="Sylfaen"/>
-        <a:font script="Armn" typeface="Arial"/>
-        <a:font script="Bugi" typeface="Leelawadee UI"/>
-        <a:font script="Bopo" typeface="Microsoft JhengHei"/>
-        <a:font script="Java" typeface="Javanese Text"/>
-        <a:font script="Lisu" typeface="Segoe UI"/>
-        <a:font script="Mymr" typeface="Myanmar Text"/>
-        <a:font script="Nkoo" typeface="Ebrima"/>
-        <a:font script="Olck" typeface="Nirmala UI"/>
-        <a:font script="Osma" typeface="Ebrima"/>
-        <a:font script="Phag" typeface="Phagspa"/>
-        <a:font script="Syrn" typeface="Estrangelo Edessa"/>
-        <a:font script="Syrj" typeface="Estrangelo Edessa"/>
-        <a:font script="Syre" typeface="Estrangelo Edessa"/>
-        <a:font script="Sora" typeface="Nirmala UI"/>
-        <a:font script="Tale" typeface="Microsoft Tai Le"/>
-        <a:font script="Talu" typeface="Microsoft New Tai Lue"/>
-        <a:font script="Tfng" typeface="Ebrima"/>
       </a:minorFont>
     </a:fontScheme>
     <a:fmtScheme name="Office">
@@ -26588,141 +26354,200 @@
           <a:gsLst>
             <a:gs pos="0">
               <a:schemeClr val="phClr">
-                <a:lumMod val="110000"/>
-                <a:satMod val="105000"/>
-                <a:tint val="67000"/>
+                <a:tint val="50000"/>
+                <a:satMod val="300000"/>
               </a:schemeClr>
             </a:gs>
-            <a:gs pos="50000">
+            <a:gs pos="35000">
               <a:schemeClr val="phClr">
-                <a:lumMod val="105000"/>
-                <a:satMod val="103000"/>
-                <a:tint val="73000"/>
+                <a:tint val="37000"/>
+                <a:satMod val="300000"/>
               </a:schemeClr>
             </a:gs>
             <a:gs pos="100000">
               <a:schemeClr val="phClr">
-                <a:lumMod val="105000"/>
-                <a:satMod val="109000"/>
-                <a:tint val="81000"/>
+                <a:tint val="15000"/>
+                <a:satMod val="350000"/>
               </a:schemeClr>
             </a:gs>
           </a:gsLst>
-          <a:lin ang="5400000" scaled="0"/>
+          <a:lin ang="16200000" scaled="1"/>
         </a:gradFill>
         <a:gradFill rotWithShape="1">
           <a:gsLst>
             <a:gs pos="0">
               <a:schemeClr val="phClr">
-                <a:satMod val="103000"/>
-                <a:lumMod val="102000"/>
-                <a:tint val="94000"/>
-              </a:schemeClr>
-            </a:gs>
-            <a:gs pos="50000">
-              <a:schemeClr val="phClr">
-                <a:satMod val="110000"/>
-                <a:lumMod val="100000"/>
+                <a:tint val="100000"/>
                 <a:shade val="100000"/>
+                <a:satMod val="130000"/>
               </a:schemeClr>
             </a:gs>
             <a:gs pos="100000">
               <a:schemeClr val="phClr">
-                <a:lumMod val="99000"/>
-                <a:satMod val="120000"/>
-                <a:shade val="78000"/>
+                <a:tint val="50000"/>
+                <a:shade val="100000"/>
+                <a:satMod val="350000"/>
               </a:schemeClr>
             </a:gs>
           </a:gsLst>
-          <a:lin ang="5400000" scaled="0"/>
+          <a:lin ang="16200000" scaled="0"/>
         </a:gradFill>
       </a:fillStyleLst>
       <a:lnStyleLst>
-        <a:ln w="6350" cap="flat" cmpd="sng" algn="ctr">
+        <a:ln w="9525" cap="flat" cmpd="sng" algn="ctr">
+          <a:solidFill>
+            <a:schemeClr val="phClr">
+              <a:shade val="95000"/>
+              <a:satMod val="105000"/>
+            </a:schemeClr>
+          </a:solidFill>
+          <a:prstDash val="solid"/>
+        </a:ln>
+        <a:ln w="25400" cap="flat" cmpd="sng" algn="ctr">
           <a:solidFill>
             <a:schemeClr val="phClr"/>
           </a:solidFill>
           <a:prstDash val="solid"/>
-          <a:miter lim="800000"/>
         </a:ln>
-        <a:ln w="12700" cap="flat" cmpd="sng" algn="ctr">
+        <a:ln w="38100" cap="flat" cmpd="sng" algn="ctr">
           <a:solidFill>
             <a:schemeClr val="phClr"/>
           </a:solidFill>
           <a:prstDash val="solid"/>
-          <a:miter lim="800000"/>
-        </a:ln>
-        <a:ln w="19050" cap="flat" cmpd="sng" algn="ctr">
-          <a:solidFill>
-            <a:schemeClr val="phClr"/>
-          </a:solidFill>
-          <a:prstDash val="solid"/>
-          <a:miter lim="800000"/>
         </a:ln>
       </a:lnStyleLst>
       <a:effectStyleLst>
         <a:effectStyle>
-          <a:effectLst/>
-        </a:effectStyle>
-        <a:effectStyle>
-          <a:effectLst/>
+          <a:effectLst>
+            <a:outerShdw blurRad="40000" dist="20000" dir="5400000" rotWithShape="0">
+              <a:srgbClr val="000000">
+                <a:alpha val="38000"/>
+              </a:srgbClr>
+            </a:outerShdw>
+          </a:effectLst>
         </a:effectStyle>
         <a:effectStyle>
           <a:effectLst>
-            <a:outerShdw blurRad="57150" dist="19050" dir="5400000" algn="ctr" rotWithShape="0">
+            <a:outerShdw blurRad="40000" dist="23000" dir="5400000" rotWithShape="0">
               <a:srgbClr val="000000">
-                <a:alpha val="63000"/>
+                <a:alpha val="35000"/>
               </a:srgbClr>
             </a:outerShdw>
           </a:effectLst>
+        </a:effectStyle>
+        <a:effectStyle>
+          <a:effectLst>
+            <a:outerShdw blurRad="40000" dist="23000" dir="5400000" rotWithShape="0">
+              <a:srgbClr val="000000">
+                <a:alpha val="35000"/>
+              </a:srgbClr>
+            </a:outerShdw>
+          </a:effectLst>
+          <a:scene3d>
+            <a:camera prst="orthographicFront">
+              <a:rot lat="0" lon="0" rev="0"/>
+            </a:camera>
+            <a:lightRig rig="threePt" dir="t">
+              <a:rot lat="0" lon="0" rev="1200000"/>
+            </a:lightRig>
+          </a:scene3d>
+          <a:sp3d>
+            <a:bevelT w="63500" h="25400"/>
+          </a:sp3d>
         </a:effectStyle>
       </a:effectStyleLst>
       <a:bgFillStyleLst>
         <a:solidFill>
           <a:schemeClr val="phClr"/>
         </a:solidFill>
-        <a:solidFill>
-          <a:schemeClr val="phClr">
-            <a:tint val="95000"/>
-            <a:satMod val="170000"/>
-          </a:schemeClr>
-        </a:solidFill>
         <a:gradFill rotWithShape="1">
           <a:gsLst>
             <a:gs pos="0">
               <a:schemeClr val="phClr">
-                <a:tint val="93000"/>
-                <a:satMod val="150000"/>
-                <a:shade val="98000"/>
-                <a:lumMod val="102000"/>
+                <a:tint val="40000"/>
+                <a:satMod val="350000"/>
               </a:schemeClr>
             </a:gs>
-            <a:gs pos="50000">
+            <a:gs pos="40000">
               <a:schemeClr val="phClr">
-                <a:tint val="98000"/>
-                <a:satMod val="130000"/>
-                <a:shade val="90000"/>
-                <a:lumMod val="103000"/>
+                <a:tint val="45000"/>
+                <a:shade val="99000"/>
+                <a:satMod val="350000"/>
               </a:schemeClr>
             </a:gs>
             <a:gs pos="100000">
               <a:schemeClr val="phClr">
-                <a:shade val="63000"/>
-                <a:satMod val="120000"/>
+                <a:shade val="20000"/>
+                <a:satMod val="255000"/>
               </a:schemeClr>
             </a:gs>
           </a:gsLst>
-          <a:lin ang="5400000" scaled="0"/>
+          <a:path path="circle">
+            <a:fillToRect l="50000" t="-80000" r="50000" b="180000"/>
+          </a:path>
+        </a:gradFill>
+        <a:gradFill rotWithShape="1">
+          <a:gsLst>
+            <a:gs pos="0">
+              <a:schemeClr val="phClr">
+                <a:tint val="80000"/>
+                <a:satMod val="300000"/>
+              </a:schemeClr>
+            </a:gs>
+            <a:gs pos="100000">
+              <a:schemeClr val="phClr">
+                <a:shade val="30000"/>
+                <a:satMod val="200000"/>
+              </a:schemeClr>
+            </a:gs>
+          </a:gsLst>
+          <a:path path="circle">
+            <a:fillToRect l="50000" t="50000" r="50000" b="50000"/>
+          </a:path>
         </a:gradFill>
       </a:bgFillStyleLst>
     </a:fmtScheme>
   </a:themeElements>
-  <a:objectDefaults/>
+  <a:objectDefaults>
+    <a:spDef>
+      <a:spPr/>
+      <a:bodyPr/>
+      <a:lstStyle/>
+      <a:style>
+        <a:lnRef idx="1">
+          <a:schemeClr val="accent1"/>
+        </a:lnRef>
+        <a:fillRef idx="3">
+          <a:schemeClr val="accent1"/>
+        </a:fillRef>
+        <a:effectRef idx="2">
+          <a:schemeClr val="accent1"/>
+        </a:effectRef>
+        <a:fontRef idx="minor">
+          <a:schemeClr val="lt1"/>
+        </a:fontRef>
+      </a:style>
+    </a:spDef>
+    <a:lnDef>
+      <a:spPr/>
+      <a:bodyPr/>
+      <a:lstStyle/>
+      <a:style>
+        <a:lnRef idx="2">
+          <a:schemeClr val="accent1"/>
+        </a:lnRef>
+        <a:fillRef idx="0">
+          <a:schemeClr val="accent1"/>
+        </a:fillRef>
+        <a:effectRef idx="1">
+          <a:schemeClr val="accent1"/>
+        </a:effectRef>
+        <a:fontRef idx="minor">
+          <a:schemeClr val="tx1"/>
+        </a:fontRef>
+      </a:style>
+    </a:lnDef>
+  </a:objectDefaults>
   <a:extraClrSchemeLst/>
-  <a:extLst>
-    <a:ext uri="{05A4C25C-085E-4340-85A3-A5531E510DB2}">
-      <thm15:themeFamily xmlns:thm15="http://schemas.microsoft.com/office/thememl/2012/main" name="Office Theme" id="{62F939B6-93AF-4DB8-9C6B-D6C7DFDC589F}" vid="{4A3C46E8-61CC-4603-A589-7422A47A8E4A}"/>
-    </a:ext>
-  </a:extLst>
 </a:theme>
 </file>
--- a/Docs/Slides/S2520110_仁木祥真_20261028.pptx
+++ b/Docs/Slides/S2520110_仁木祥真_20261028.pptx
@@ -1227,7 +1227,7 @@
           <a:lstStyle/>
           <a:p>
             <a:r>
-              <a:t>ここからが今回の進捗です。前回は、既存の MPM 実装である GbLeem/Unreal_MPM を土台にする予定でしたが、現在は UE5 の GPU パーティクル機能である Niagara の上で、MPM を一から段階的に組み立てています。理由は二つあります。一つ目は、砂の構成則を論文どおりに実装し、各段階の挙動を理論値で確かめながら進めるためです。二つ目は、Niagara は UE の描画と直接つながっているので、粒子の表示と、運転用の地形表示を同じ仕組みの上で切り替えられるためです。</a:t>
+              <a:t>ここからが今回の進捗です。前回は、既存の MPM 実装である GbLeem/Unreal_MPM を土台にする予定でしたが、現在は UE5 の GPU パーティクル機能である Niagara の上で、MPM を一から段階的に組み立てています。理由は二つあります。一つ目は、砂の構成則を論文どおりに実装し、各段階の挙動を解析解で確かめながら進めるためです。ここでの解析解とは、自由落下や床の上での静止のような単純な条件で、運動方程式や定義から手計算で求められる値のことです。二つ目は、Niagara は UE の描画と直接つながっているので、粒子の表示と、運転用の地形表示を同じ仕組みの上で切り替えられるためです。</a:t>
             </a:r>
           </a:p>
         </p:txBody>
@@ -1367,7 +1367,7 @@
           <a:lstStyle/>
           <a:p>
             <a:r>
-              <a:t>1 ステップの計算は、格子の初期化、P2G、格子の更新、G2P の四段階で、Niagara のシミュレーションステージとして GPU で実行しています。計算条件は、粒子 1 万 8 千個、格子間隔 2 センチメートル、時間刻み 240 分の 1 秒です。実装は段階ごとに機能を足し、各段階で結果がどうなるべきかを事前に手計算してから、シミュレーションの値と照合しています。現在は変形勾配 F の更新まで完了し、次は弾性体の応力を入れる段階です。</a:t>
+              <a:t>1 ステップの計算は、格子の初期化、P2G、格子の更新、G2P の四段階で、Niagara のシミュレーションステージとして GPU で実行しています。計算条件は、粒子 1 万 8 千個、格子間隔 2 センチメートル、時間刻み 240 分の 1 秒です。実装は段階ごとに機能を足し、各段階で、自由落下や静止のような単純な条件を選んで、結果がどうなるべきかを事前に手計算してから、シミュレーションの値と照合しています。現在は変形勾配 F の更新まで完了し、次は弾性体の応力を入れる段階です。</a:t>
             </a:r>
           </a:p>
         </p:txBody>
@@ -1437,7 +1437,7 @@
           <a:lstStyle/>
           <a:p>
             <a:r>
-              <a:t>主な段階の照合結果です。P2G では、内部の密度が設定したかさ密度 1.5 に一致しました。格子の更新では、1 ステップ目の速度が重力加速度と時間刻みの積に一致しました。この確認だけは時間刻み 60 分の 1 秒で行っています。床では粒子が床の位置で止まり、APIC では床で静止した粒子の速度勾配が手計算の値に一致しました。変形勾配 F は、着地前の自由落下中は単位行列のままになるはずで、全粒子でそのとおりになりました。</a:t>
+              <a:t>主な段階の照合結果です。どの段も、結果が手計算で決まる単純な条件を選び、その値と比べています。根拠は表の三列目です。P2G では、内部の密度が設定したかさ密度 1.5 に一致しました。格子の更新では、1 ステップ目の速度が重力加速度と時間刻みの積に一致しました。この確認だけは時間刻み 60 分の 1 秒で行っています。床では粒子が床の位置で止まり、APIC では床で静止した粒子の速度勾配が手計算の値に一致しました。変形勾配 F は、着地前の自由落下中は単位行列のままになるはずで、全粒子でそのとおりになりました。</a:t>
             </a:r>
           </a:p>
         </p:txBody>
@@ -1717,7 +1717,7 @@
           <a:lstStyle/>
           <a:p>
             <a:r>
-              <a:t>まとめます。月面ローバーの運転シミュレータには、レゴリスとホイールの相互作用の再現が必要ですが、DEM ではリアルタイム性の確保が難しいという課題があります。そこで、走行体感をテラメカニクス理論で、接地部の挙動を局所的な MPM で計算する手法を提案しています。今回は MPM を Niagara 上で段階的に構築し、変形勾配の更新まで、すべての段階で理論値との一致を確かめました。今後は弾性と塑性を入れ、安息角試験で検証します。以上です。ありがとうございました。</a:t>
+              <a:t>まとめます。月面ローバーの運転シミュレータには、レゴリスとホイールの相互作用の再現が必要ですが、DEM ではリアルタイム性の確保が難しいという課題があります。そこで、走行体感をテラメカニクス理論で、接地部の挙動を局所的な MPM で計算する手法を提案しています。今回は MPM を Niagara 上で段階的に構築し、変形勾配の更新まで、すべての段階で解析解との一致を確かめました。今後は弾性と塑性を入れ、安息角試験で検証します。以上です。ありがとうございました。</a:t>
             </a:r>
           </a:p>
         </p:txBody>
@@ -13694,7 +13694,7 @@
                           <a:latin typeface="BIZ UDPゴシック"/>
                           <a:ea typeface="BIZ UDPゴシック"/>
                         </a:rPr>
-                        <a:t>段階ごとに理論値と照合</a:t>
+                        <a:t>段階ごとに解析解と照合</a:t>
                       </a:r>
                     </a:p>
                   </a:txBody>
@@ -13878,7 +13878,7 @@
                 <a:latin typeface="BIZ UDPゴシック"/>
                 <a:ea typeface="BIZ UDPゴシック"/>
               </a:rPr>
-              <a:t> に実装し、各段を理論値で確かめるため</a:t>
+              <a:t> に実装し、各段を解析解で確かめるため</a:t>
             </a:r>
           </a:p>
         </p:txBody>
@@ -16353,7 +16353,7 @@
                 <a:latin typeface="BIZ UDPゴシック"/>
                 <a:ea typeface="BIZ UDPゴシック"/>
               </a:rPr>
-              <a:t>各段で結果の理論値を事前に計算し、シミュレーションの値と照合してから次の段階へ進む</a:t>
+              <a:t>各段で、単純な条件（自由落下、床の上での静止など）の解析解を事前に手計算し、シミュレーションの値と照合してから次の段階へ進む</a:t>
             </a:r>
           </a:p>
         </p:txBody>
@@ -16561,7 +16561,7 @@
                 <a:latin typeface="BIZ UDPゴシック"/>
                 <a:ea typeface="BIZ UDPゴシック"/>
               </a:rPr>
-              <a:t>今回の進捗：理論値との照合</a:t>
+              <a:t>今回の進捗：解析解との照合</a:t>
             </a:r>
           </a:p>
         </p:txBody>
@@ -16629,10 +16629,11 @@
                 <a:tableStyleId>{2D5ABB26-0587-4C30-8999-92F81FD0307C}</a:tableStyleId>
               </a:tblPr>
               <a:tblGrid>
-                <a:gridCol w="2103120"/>
-                <a:gridCol w="3291840"/>
+                <a:gridCol w="1600200"/>
                 <a:gridCol w="2651760"/>
-                <a:gridCol w="3044952"/>
+                <a:gridCol w="2834640"/>
+                <a:gridCol w="1920240"/>
+                <a:gridCol w="2084832"/>
               </a:tblGrid>
               <a:tr h="457200">
                 <a:tc>
@@ -16725,7 +16726,45 @@
                           <a:latin typeface="BIZ UDPゴシック"/>
                           <a:ea typeface="BIZ UDPゴシック"/>
                         </a:rPr>
-                        <a:t>理論値</a:t>
+                        <a:t>根拠</a:t>
+                      </a:r>
+                    </a:p>
+                  </a:txBody>
+                  <a:tcPr marL="91440" marR="91440" anchor="ctr">
+                    <a:lnL w="0">
+                      <a:noFill/>
+                    </a:lnL>
+                    <a:lnR w="0">
+                      <a:noFill/>
+                    </a:lnR>
+                    <a:lnT w="0">
+                      <a:noFill/>
+                    </a:lnT>
+                    <a:lnB w="9525">
+                      <a:solidFill>
+                        <a:srgbClr val="D9DEE6"/>
+                      </a:solidFill>
+                    </a:lnB>
+                    <a:solidFill>
+                      <a:srgbClr val="1F3A5F"/>
+                    </a:solidFill>
+                  </a:tcPr>
+                </a:tc>
+                <a:tc>
+                  <a:txBody>
+                    <a:bodyPr/>
+                    <a:lstStyle/>
+                    <a:p>
+                      <a:pPr algn="ctr"/>
+                      <a:r>
+                        <a:rPr sz="1600" b="1">
+                          <a:solidFill>
+                            <a:srgbClr val="FFFFFF"/>
+                          </a:solidFill>
+                          <a:latin typeface="BIZ UDPゴシック"/>
+                          <a:ea typeface="BIZ UDPゴシック"/>
+                        </a:rPr>
+                        <a:t>解析解</a:t>
                       </a:r>
                     </a:p>
                   </a:txBody>
@@ -16875,6 +16914,42 @@
                           <a:latin typeface="BIZ UDPゴシック"/>
                           <a:ea typeface="BIZ UDPゴシック"/>
                         </a:rPr>
+                        <a:t>密度 = 質量 / 体積</a:t>
+                      </a:r>
+                    </a:p>
+                  </a:txBody>
+                  <a:tcPr marL="91440" marR="91440" anchor="ctr">
+                    <a:lnL w="0">
+                      <a:noFill/>
+                    </a:lnL>
+                    <a:lnR w="0">
+                      <a:noFill/>
+                    </a:lnR>
+                    <a:lnT w="0">
+                      <a:noFill/>
+                    </a:lnT>
+                    <a:lnB w="9525">
+                      <a:solidFill>
+                        <a:srgbClr val="D9DEE6"/>
+                      </a:solidFill>
+                    </a:lnB>
+                    <a:noFill/>
+                  </a:tcPr>
+                </a:tc>
+                <a:tc>
+                  <a:txBody>
+                    <a:bodyPr/>
+                    <a:lstStyle/>
+                    <a:p>
+                      <a:pPr algn="ctr"/>
+                      <a:r>
+                        <a:rPr sz="1800" b="0">
+                          <a:solidFill>
+                            <a:srgbClr val="262626"/>
+                          </a:solidFill>
+                          <a:latin typeface="BIZ UDPゴシック"/>
+                          <a:ea typeface="BIZ UDPゴシック"/>
+                        </a:rPr>
                         <a:t>1.5 g/cm³</a:t>
                       </a:r>
                     </a:p>
@@ -16951,7 +17026,7 @@
                           <a:latin typeface="BIZ UDPゴシック"/>
                           <a:ea typeface="BIZ UDPゴシック"/>
                         </a:rPr>
-                        <a:t>格子更新と G2P</a:t>
+                        <a:t>格子の更新</a:t>
                       </a:r>
                     </a:p>
                   </a:txBody>
@@ -16987,7 +17062,43 @@
                           <a:latin typeface="BIZ UDPゴシック"/>
                           <a:ea typeface="BIZ UDPゴシック"/>
                         </a:rPr>
-                        <a:t>1 ステップ目の速度 ※</a:t>
+                        <a:t>1 ステップ目の速度※</a:t>
+                      </a:r>
+                    </a:p>
+                  </a:txBody>
+                  <a:tcPr marL="91440" marR="91440" anchor="ctr">
+                    <a:lnL w="0">
+                      <a:noFill/>
+                    </a:lnL>
+                    <a:lnR w="0">
+                      <a:noFill/>
+                    </a:lnR>
+                    <a:lnT w="0">
+                      <a:noFill/>
+                    </a:lnT>
+                    <a:lnB w="9525">
+                      <a:solidFill>
+                        <a:srgbClr val="D9DEE6"/>
+                      </a:solidFill>
+                    </a:lnB>
+                    <a:noFill/>
+                  </a:tcPr>
+                </a:tc>
+                <a:tc>
+                  <a:txBody>
+                    <a:bodyPr/>
+                    <a:lstStyle/>
+                    <a:p>
+                      <a:pPr algn="ctr"/>
+                      <a:r>
+                        <a:rPr sz="1800" b="0">
+                          <a:solidFill>
+                            <a:srgbClr val="262626"/>
+                          </a:solidFill>
+                          <a:latin typeface="BIZ UDPゴシック"/>
+                          <a:ea typeface="BIZ UDPゴシック"/>
+                        </a:rPr>
+                        <a:t>等加速度運動 v = gΔt</a:t>
                       </a:r>
                     </a:p>
                   </a:txBody>
@@ -17171,7 +17282,43 @@
                           <a:latin typeface="BIZ UDPゴシック"/>
                           <a:ea typeface="BIZ UDPゴシック"/>
                         </a:rPr>
-                        <a:t>z = −10 cm、v = 0</a:t>
+                        <a:t>床にめり込まない条件</a:t>
+                      </a:r>
+                    </a:p>
+                  </a:txBody>
+                  <a:tcPr marL="91440" marR="91440" anchor="ctr">
+                    <a:lnL w="0">
+                      <a:noFill/>
+                    </a:lnL>
+                    <a:lnR w="0">
+                      <a:noFill/>
+                    </a:lnR>
+                    <a:lnT w="0">
+                      <a:noFill/>
+                    </a:lnT>
+                    <a:lnB w="9525">
+                      <a:solidFill>
+                        <a:srgbClr val="D9DEE6"/>
+                      </a:solidFill>
+                    </a:lnB>
+                    <a:noFill/>
+                  </a:tcPr>
+                </a:tc>
+                <a:tc>
+                  <a:txBody>
+                    <a:bodyPr/>
+                    <a:lstStyle/>
+                    <a:p>
+                      <a:pPr algn="ctr"/>
+                      <a:r>
+                        <a:rPr sz="1800" b="0">
+                          <a:solidFill>
+                            <a:srgbClr val="262626"/>
+                          </a:solidFill>
+                          <a:latin typeface="BIZ UDPゴシック"/>
+                          <a:ea typeface="BIZ UDPゴシック"/>
+                        </a:rPr>
+                        <a:t>z = −10、v = 0</a:t>
                       </a:r>
                     </a:p>
                   </a:txBody>
@@ -17207,7 +17354,7 @@
                           <a:latin typeface="BIZ UDPゴシック"/>
                           <a:ea typeface="BIZ UDPゴシック"/>
                         </a:rPr>
-                        <a:t>z = −10 cm、v = 0</a:t>
+                        <a:t>z = −10、v = 0</a:t>
                       </a:r>
                     </a:p>
                   </a:txBody>
@@ -17283,7 +17430,43 @@
                           <a:latin typeface="BIZ UDPゴシック"/>
                           <a:ea typeface="BIZ UDPゴシック"/>
                         </a:rPr>
-                        <a:t>床で静止した粒子の C_zz</a:t>
+                        <a:t>静止粒子の C_zz</a:t>
+                      </a:r>
+                    </a:p>
+                  </a:txBody>
+                  <a:tcPr marL="91440" marR="91440" anchor="ctr">
+                    <a:lnL w="0">
+                      <a:noFill/>
+                    </a:lnL>
+                    <a:lnR w="0">
+                      <a:noFill/>
+                    </a:lnR>
+                    <a:lnT w="0">
+                      <a:noFill/>
+                    </a:lnT>
+                    <a:lnB w="9525">
+                      <a:solidFill>
+                        <a:srgbClr val="D9DEE6"/>
+                      </a:solidFill>
+                    </a:lnB>
+                    <a:noFill/>
+                  </a:tcPr>
+                </a:tc>
+                <a:tc>
+                  <a:txBody>
+                    <a:bodyPr/>
+                    <a:lstStyle/>
+                    <a:p>
+                      <a:pPr algn="ctr"/>
+                      <a:r>
+                        <a:rPr sz="1800" b="0">
+                          <a:solidFill>
+                            <a:srgbClr val="262626"/>
+                          </a:solidFill>
+                          <a:latin typeface="BIZ UDPゴシック"/>
+                          <a:ea typeface="BIZ UDPゴシック"/>
+                        </a:rPr>
+                        <a:t>速度勾配の定義式</a:t>
                       </a:r>
                     </a:p>
                   </a:txBody>
@@ -17467,6 +17650,42 @@
                           <a:latin typeface="BIZ UDPゴシック"/>
                           <a:ea typeface="BIZ UDPゴシック"/>
                         </a:rPr>
+                        <a:t>平行移動では変形しない</a:t>
+                      </a:r>
+                    </a:p>
+                  </a:txBody>
+                  <a:tcPr marL="91440" marR="91440" anchor="ctr">
+                    <a:lnL w="0">
+                      <a:noFill/>
+                    </a:lnL>
+                    <a:lnR w="0">
+                      <a:noFill/>
+                    </a:lnR>
+                    <a:lnT w="0">
+                      <a:noFill/>
+                    </a:lnT>
+                    <a:lnB w="9525">
+                      <a:solidFill>
+                        <a:srgbClr val="D9DEE6"/>
+                      </a:solidFill>
+                    </a:lnB>
+                    <a:noFill/>
+                  </a:tcPr>
+                </a:tc>
+                <a:tc>
+                  <a:txBody>
+                    <a:bodyPr/>
+                    <a:lstStyle/>
+                    <a:p>
+                      <a:pPr algn="ctr"/>
+                      <a:r>
+                        <a:rPr sz="1800" b="0">
+                          <a:solidFill>
+                            <a:srgbClr val="262626"/>
+                          </a:solidFill>
+                          <a:latin typeface="BIZ UDPゴシック"/>
+                          <a:ea typeface="BIZ UDPゴシック"/>
+                        </a:rPr>
                         <a:t>単位行列 I</a:t>
                       </a:r>
                     </a:p>
@@ -17628,7 +17847,7 @@
                 <a:latin typeface="BIZ UDPゴシック"/>
                 <a:ea typeface="BIZ UDPゴシック"/>
               </a:rPr>
-              <a:t>理論値と一致</a:t>
+              <a:t>解析解と一致</a:t>
             </a:r>
           </a:p>
         </p:txBody>
@@ -20705,7 +20924,7 @@
                 <a:latin typeface="BIZ UDPゴシック"/>
                 <a:ea typeface="BIZ UDPゴシック"/>
               </a:rPr>
-              <a:t>MPM を Niagara 上に構築し、全段で理論値と一致</a:t>
+              <a:t>MPM を Niagara 上に構築し、全段で解析解と一致</a:t>
             </a:r>
           </a:p>
         </p:txBody>
